--- a/REPERTÓRIO/Repertório Rota do Chopp - VS.pptx
+++ b/REPERTÓRIO/Repertório Rota do Chopp - VS.pptx
@@ -43,15 +43,6 @@
     <p:sldId id="477" r:id="rId34"/>
     <p:sldId id="481" r:id="rId43"/>
     <p:sldId id="482" r:id="rId44"/>
-    <p:sldId id="483" r:id="rId45"/>
-    <p:sldId id="484" r:id="rId46"/>
-    <p:sldId id="485" r:id="rId47"/>
-    <p:sldId id="486" r:id="rId48"/>
-    <p:sldId id="487" r:id="rId49"/>
-    <p:sldId id="488" r:id="rId50"/>
-    <p:sldId id="489" r:id="rId51"/>
-    <p:sldId id="490" r:id="rId52"/>
-    <p:sldId id="491" r:id="rId53"/>
   </p:sldIdLst>
   <p:sldSz cx="12192000" cy="6858000"/>
   <p:notesSz cx="6858000" cy="9144000"/>
@@ -10361,7 +10352,7 @@
                   <a:srgbClr val="FF0000"/>
                 </a:solidFill>
               </a:rPr>
-              <a:t>??</a:t>
+              <a:t>Fa</a:t>
             </a:r>
           </a:p>
         </p:txBody>
@@ -10447,7 +10438,7 @@
             </a:pPr>
             <a:r>
               <a:rPr lang="pt-BR" sz="7200" dirty="0"/>
-              <a:t>Loop de Vaneira </a:t>
+              <a:t>Maratá </a:t>
             </a:r>
             <a:r>
               <a:rPr lang="pt-BR" sz="7200" dirty="0">
@@ -10455,93 +10446,14 @@
                   <a:srgbClr val="FF0000"/>
                 </a:solidFill>
               </a:rPr>
-              <a:t>82 BPM</a:t>
-            </a:r>
-          </a:p>
-        </p:txBody>
-      </p:sp>
-    </p:spTree>
-  </p:cSld>
-  <p:clrMapOvr>
-    <a:masterClrMapping/>
-  </p:clrMapOvr>
-</p:sld>
-</file>
-
-<file path=ppt/slides/slide36.xml><?xml version="1.0" encoding="utf-8"?>
-<p:sld xmlns:a="http://schemas.openxmlformats.org/drawingml/2006/main" xmlns:r="http://schemas.openxmlformats.org/officeDocument/2006/relationships" xmlns:p="http://schemas.openxmlformats.org/presentationml/2006/main">
-  <p:cSld>
-    <p:spTree>
-      <p:nvGrpSpPr>
-        <p:cNvPr id="1" name=""/>
-        <p:cNvGrpSpPr/>
-        <p:nvPr/>
-      </p:nvGrpSpPr>
-      <p:grpSpPr>
-        <a:xfrm>
-          <a:off x="0" y="0"/>
-          <a:ext cx="0" cy="0"/>
-          <a:chOff x="0" y="0"/>
-          <a:chExt cx="0" cy="0"/>
-        </a:xfrm>
-      </p:grpSpPr>
-      <p:sp>
-        <p:nvSpPr>
-          <p:cNvPr id="3" name="Espaço Reservado para Conteúdo 2">
-            <a:extLst>
-              <a:ext uri="{FF2B5EF4-FFF2-40B4-BE49-F238E27FC236}">
-                <a16:creationId xmlns:a16="http://schemas.microsoft.com/office/drawing/2014/main" id="{7C70BAA2-54A1-BAA9-5EF9-9F93F22AE700}"/>
-              </a:ext>
-            </a:extLst>
-          </p:cNvPr>
-          <p:cNvSpPr>
-            <a:spLocks noGrp="1"/>
-          </p:cNvSpPr>
-          <p:nvPr>
-            <p:ph idx="1"/>
-          </p:nvPr>
-        </p:nvSpPr>
-        <p:spPr>
-          <a:xfrm>
-            <a:off x="10509" y="-3937"/>
-            <a:ext cx="12181491" cy="6861937"/>
-          </a:xfrm>
-        </p:spPr>
-        <p:txBody>
-          <a:bodyPr>
-            <a:noAutofit/>
-          </a:bodyPr>
-          <a:lstStyle/>
-          <a:p>
-            <a:pPr algn="ctr">
-              <a:lnSpc>
-                <a:spcPct val="100000"/>
-              </a:lnSpc>
-              <a:buNone/>
-            </a:pPr>
-            <a:r>
-              <a:rPr lang="en-US" sz="8800" dirty="0">
-                <a:solidFill>
-                  <a:srgbClr val="FF0000"/>
-                </a:solidFill>
-                <a:cs typeface="Arial" panose="020B0604020202020204" pitchFamily="34" charset="0"/>
-              </a:rPr>
-              <a:t>VS BLOCO 35</a:t>
-            </a:r>
-          </a:p>
-          <a:p>
-            <a:pPr marL="36000" indent="-252000" algn="ctr">
-              <a:lnSpc>
-                <a:spcPct val="100000"/>
-              </a:lnSpc>
-              <a:spcBef>
-                <a:spcPts val="0"/>
-              </a:spcBef>
-              <a:buNone/>
-            </a:pPr>
-            <a:r>
-              <a:rPr lang="pt-BR" sz="7200" dirty="0"/>
-              <a:t>Loop de Vaneira </a:t>
+              <a:t>??</a:t>
+            </a:r>
+            <a:br>
+              <a:rPr lang="pt-BR" sz="7200" dirty="0"/>
+            </a:br>
+            <a:r>
+              <a:rPr lang="pt-BR" sz="7200" dirty="0"/>
+              <a:t>Levanta a Poeira </a:t>
             </a:r>
             <a:r>
               <a:rPr lang="pt-BR" sz="7200" dirty="0">
@@ -10549,93 +10461,14 @@
                   <a:srgbClr val="FF0000"/>
                 </a:solidFill>
               </a:rPr>
-              <a:t>90 BPM</a:t>
-            </a:r>
-          </a:p>
-        </p:txBody>
-      </p:sp>
-    </p:spTree>
-  </p:cSld>
-  <p:clrMapOvr>
-    <a:masterClrMapping/>
-  </p:clrMapOvr>
-</p:sld>
-</file>
-
-<file path=ppt/slides/slide37.xml><?xml version="1.0" encoding="utf-8"?>
-<p:sld xmlns:a="http://schemas.openxmlformats.org/drawingml/2006/main" xmlns:r="http://schemas.openxmlformats.org/officeDocument/2006/relationships" xmlns:p="http://schemas.openxmlformats.org/presentationml/2006/main">
-  <p:cSld>
-    <p:spTree>
-      <p:nvGrpSpPr>
-        <p:cNvPr id="1" name=""/>
-        <p:cNvGrpSpPr/>
-        <p:nvPr/>
-      </p:nvGrpSpPr>
-      <p:grpSpPr>
-        <a:xfrm>
-          <a:off x="0" y="0"/>
-          <a:ext cx="0" cy="0"/>
-          <a:chOff x="0" y="0"/>
-          <a:chExt cx="0" cy="0"/>
-        </a:xfrm>
-      </p:grpSpPr>
-      <p:sp>
-        <p:nvSpPr>
-          <p:cNvPr id="3" name="Espaço Reservado para Conteúdo 2">
-            <a:extLst>
-              <a:ext uri="{FF2B5EF4-FFF2-40B4-BE49-F238E27FC236}">
-                <a16:creationId xmlns:a16="http://schemas.microsoft.com/office/drawing/2014/main" id="{7C70BAA2-54A1-BAA9-5EF9-9F93F22AE700}"/>
-              </a:ext>
-            </a:extLst>
-          </p:cNvPr>
-          <p:cNvSpPr>
-            <a:spLocks noGrp="1"/>
-          </p:cNvSpPr>
-          <p:nvPr>
-            <p:ph idx="1"/>
-          </p:nvPr>
-        </p:nvSpPr>
-        <p:spPr>
-          <a:xfrm>
-            <a:off x="10509" y="-3937"/>
-            <a:ext cx="12181491" cy="6861937"/>
-          </a:xfrm>
-        </p:spPr>
-        <p:txBody>
-          <a:bodyPr>
-            <a:noAutofit/>
-          </a:bodyPr>
-          <a:lstStyle/>
-          <a:p>
-            <a:pPr algn="ctr">
-              <a:lnSpc>
-                <a:spcPct val="100000"/>
-              </a:lnSpc>
-              <a:buNone/>
-            </a:pPr>
-            <a:r>
-              <a:rPr lang="en-US" sz="8800" dirty="0">
-                <a:solidFill>
-                  <a:srgbClr val="FF0000"/>
-                </a:solidFill>
-                <a:cs typeface="Arial" panose="020B0604020202020204" pitchFamily="34" charset="0"/>
-              </a:rPr>
-              <a:t>VS BLOCO 36</a:t>
-            </a:r>
-          </a:p>
-          <a:p>
-            <a:pPr marL="36000" indent="-252000" algn="ctr">
-              <a:lnSpc>
-                <a:spcPct val="100000"/>
-              </a:lnSpc>
-              <a:spcBef>
-                <a:spcPts val="0"/>
-              </a:spcBef>
-              <a:buNone/>
-            </a:pPr>
-            <a:r>
-              <a:rPr lang="pt-BR" sz="7200" dirty="0"/>
-              <a:t>Loop de Vaneira </a:t>
+              <a:t>Sib</a:t>
+            </a:r>
+            <a:br>
+              <a:rPr lang="pt-BR" sz="7200" dirty="0"/>
+            </a:br>
+            <a:r>
+              <a:rPr lang="pt-BR" sz="7200" dirty="0"/>
+              <a:t>Polka do Fritz </a:t>
             </a:r>
             <a:r>
               <a:rPr lang="pt-BR" sz="7200" dirty="0">
@@ -10643,195 +10476,7 @@
                   <a:srgbClr val="FF0000"/>
                 </a:solidFill>
               </a:rPr>
-              <a:t>94 BPM</a:t>
-            </a:r>
-          </a:p>
-        </p:txBody>
-      </p:sp>
-    </p:spTree>
-  </p:cSld>
-  <p:clrMapOvr>
-    <a:masterClrMapping/>
-  </p:clrMapOvr>
-</p:sld>
-</file>
-
-<file path=ppt/slides/slide38.xml><?xml version="1.0" encoding="utf-8"?>
-<p:sld xmlns:a="http://schemas.openxmlformats.org/drawingml/2006/main" xmlns:r="http://schemas.openxmlformats.org/officeDocument/2006/relationships" xmlns:p="http://schemas.openxmlformats.org/presentationml/2006/main">
-  <p:cSld>
-    <p:spTree>
-      <p:nvGrpSpPr>
-        <p:cNvPr id="1" name=""/>
-        <p:cNvGrpSpPr/>
-        <p:nvPr/>
-      </p:nvGrpSpPr>
-      <p:grpSpPr>
-        <a:xfrm>
-          <a:off x="0" y="0"/>
-          <a:ext cx="0" cy="0"/>
-          <a:chOff x="0" y="0"/>
-          <a:chExt cx="0" cy="0"/>
-        </a:xfrm>
-      </p:grpSpPr>
-      <p:sp>
-        <p:nvSpPr>
-          <p:cNvPr id="3" name="Espaço Reservado para Conteúdo 2">
-            <a:extLst>
-              <a:ext uri="{FF2B5EF4-FFF2-40B4-BE49-F238E27FC236}">
-                <a16:creationId xmlns:a16="http://schemas.microsoft.com/office/drawing/2014/main" id="{7C70BAA2-54A1-BAA9-5EF9-9F93F22AE700}"/>
-              </a:ext>
-            </a:extLst>
-          </p:cNvPr>
-          <p:cNvSpPr>
-            <a:spLocks noGrp="1"/>
-          </p:cNvSpPr>
-          <p:nvPr>
-            <p:ph idx="1"/>
-          </p:nvPr>
-        </p:nvSpPr>
-        <p:spPr>
-          <a:xfrm>
-            <a:off x="10509" y="-3937"/>
-            <a:ext cx="12181491" cy="6861937"/>
-          </a:xfrm>
-        </p:spPr>
-        <p:txBody>
-          <a:bodyPr>
-            <a:noAutofit/>
-          </a:bodyPr>
-          <a:lstStyle/>
-          <a:p>
-            <a:pPr algn="ctr">
-              <a:lnSpc>
-                <a:spcPct val="100000"/>
-              </a:lnSpc>
-              <a:buNone/>
-            </a:pPr>
-            <a:r>
-              <a:rPr lang="en-US" sz="8800" dirty="0">
-                <a:solidFill>
-                  <a:srgbClr val="FF0000"/>
-                </a:solidFill>
-                <a:cs typeface="Arial" panose="020B0604020202020204" pitchFamily="34" charset="0"/>
-              </a:rPr>
-              <a:t>VS BLOCO 37</a:t>
-            </a:r>
-          </a:p>
-          <a:p>
-            <a:pPr marL="36000" indent="-252000" algn="ctr">
-              <a:lnSpc>
-                <a:spcPct val="100000"/>
-              </a:lnSpc>
-              <a:spcBef>
-                <a:spcPts val="0"/>
-              </a:spcBef>
-              <a:buNone/>
-            </a:pPr>
-            <a:r>
-              <a:rPr lang="pt-BR" sz="7200" dirty="0"/>
-              <a:t>Loop de Vaneira </a:t>
-            </a:r>
-            <a:r>
-              <a:rPr lang="pt-BR" sz="7200" dirty="0">
-                <a:solidFill>
-                  <a:srgbClr val="FF0000"/>
-                </a:solidFill>
-              </a:rPr>
-              <a:t>97 BPM</a:t>
-            </a:r>
-          </a:p>
-        </p:txBody>
-      </p:sp>
-    </p:spTree>
-  </p:cSld>
-  <p:clrMapOvr>
-    <a:masterClrMapping/>
-  </p:clrMapOvr>
-</p:sld>
-</file>
-
-<file path=ppt/slides/slide39.xml><?xml version="1.0" encoding="utf-8"?>
-<p:sld xmlns:a="http://schemas.openxmlformats.org/drawingml/2006/main" xmlns:r="http://schemas.openxmlformats.org/officeDocument/2006/relationships" xmlns:p="http://schemas.openxmlformats.org/presentationml/2006/main">
-  <p:cSld>
-    <p:spTree>
-      <p:nvGrpSpPr>
-        <p:cNvPr id="1" name=""/>
-        <p:cNvGrpSpPr/>
-        <p:nvPr/>
-      </p:nvGrpSpPr>
-      <p:grpSpPr>
-        <a:xfrm>
-          <a:off x="0" y="0"/>
-          <a:ext cx="0" cy="0"/>
-          <a:chOff x="0" y="0"/>
-          <a:chExt cx="0" cy="0"/>
-        </a:xfrm>
-      </p:grpSpPr>
-      <p:sp>
-        <p:nvSpPr>
-          <p:cNvPr id="3" name="Espaço Reservado para Conteúdo 2">
-            <a:extLst>
-              <a:ext uri="{FF2B5EF4-FFF2-40B4-BE49-F238E27FC236}">
-                <a16:creationId xmlns:a16="http://schemas.microsoft.com/office/drawing/2014/main" id="{7C70BAA2-54A1-BAA9-5EF9-9F93F22AE700}"/>
-              </a:ext>
-            </a:extLst>
-          </p:cNvPr>
-          <p:cNvSpPr>
-            <a:spLocks noGrp="1"/>
-          </p:cNvSpPr>
-          <p:nvPr>
-            <p:ph idx="1"/>
-          </p:nvPr>
-        </p:nvSpPr>
-        <p:spPr>
-          <a:xfrm>
-            <a:off x="10509" y="-3937"/>
-            <a:ext cx="12181491" cy="6861937"/>
-          </a:xfrm>
-        </p:spPr>
-        <p:txBody>
-          <a:bodyPr>
-            <a:noAutofit/>
-          </a:bodyPr>
-          <a:lstStyle/>
-          <a:p>
-            <a:pPr algn="ctr">
-              <a:lnSpc>
-                <a:spcPct val="100000"/>
-              </a:lnSpc>
-              <a:buNone/>
-            </a:pPr>
-            <a:r>
-              <a:rPr lang="en-US" sz="8800" dirty="0">
-                <a:solidFill>
-                  <a:srgbClr val="FF0000"/>
-                </a:solidFill>
-                <a:cs typeface="Arial" panose="020B0604020202020204" pitchFamily="34" charset="0"/>
-              </a:rPr>
-              <a:t>VS BLOCO 38</a:t>
-            </a:r>
-          </a:p>
-          <a:p>
-            <a:pPr marL="36000" indent="-252000" algn="ctr">
-              <a:lnSpc>
-                <a:spcPct val="100000"/>
-              </a:lnSpc>
-              <a:spcBef>
-                <a:spcPts val="0"/>
-              </a:spcBef>
-              <a:buNone/>
-            </a:pPr>
-            <a:r>
-              <a:rPr lang="pt-BR" sz="7200" dirty="0"/>
-              <a:t>Loop de Marcha </a:t>
-            </a:r>
-            <a:r>
-              <a:rPr lang="pt-BR" sz="7200" dirty="0">
-                <a:solidFill>
-                  <a:srgbClr val="FF0000"/>
-                </a:solidFill>
-              </a:rPr>
-              <a:t>135 BPM</a:t>
+              <a:t>??</a:t>
             </a:r>
           </a:p>
         </p:txBody>
@@ -11079,476 +10724,6 @@
         <p14:creationId xmlns:p14="http://schemas.microsoft.com/office/powerpoint/2010/main" val="3330486890"/>
       </p:ext>
     </p:extLst>
-  </p:cSld>
-  <p:clrMapOvr>
-    <a:masterClrMapping/>
-  </p:clrMapOvr>
-</p:sld>
-</file>
-
-<file path=ppt/slides/slide40.xml><?xml version="1.0" encoding="utf-8"?>
-<p:sld xmlns:a="http://schemas.openxmlformats.org/drawingml/2006/main" xmlns:r="http://schemas.openxmlformats.org/officeDocument/2006/relationships" xmlns:p="http://schemas.openxmlformats.org/presentationml/2006/main">
-  <p:cSld>
-    <p:spTree>
-      <p:nvGrpSpPr>
-        <p:cNvPr id="1" name=""/>
-        <p:cNvGrpSpPr/>
-        <p:nvPr/>
-      </p:nvGrpSpPr>
-      <p:grpSpPr>
-        <a:xfrm>
-          <a:off x="0" y="0"/>
-          <a:ext cx="0" cy="0"/>
-          <a:chOff x="0" y="0"/>
-          <a:chExt cx="0" cy="0"/>
-        </a:xfrm>
-      </p:grpSpPr>
-      <p:sp>
-        <p:nvSpPr>
-          <p:cNvPr id="3" name="Espaço Reservado para Conteúdo 2">
-            <a:extLst>
-              <a:ext uri="{FF2B5EF4-FFF2-40B4-BE49-F238E27FC236}">
-                <a16:creationId xmlns:a16="http://schemas.microsoft.com/office/drawing/2014/main" id="{7C70BAA2-54A1-BAA9-5EF9-9F93F22AE700}"/>
-              </a:ext>
-            </a:extLst>
-          </p:cNvPr>
-          <p:cNvSpPr>
-            <a:spLocks noGrp="1"/>
-          </p:cNvSpPr>
-          <p:nvPr>
-            <p:ph idx="1"/>
-          </p:nvPr>
-        </p:nvSpPr>
-        <p:spPr>
-          <a:xfrm>
-            <a:off x="10509" y="-3937"/>
-            <a:ext cx="12181491" cy="6861937"/>
-          </a:xfrm>
-        </p:spPr>
-        <p:txBody>
-          <a:bodyPr>
-            <a:noAutofit/>
-          </a:bodyPr>
-          <a:lstStyle/>
-          <a:p>
-            <a:pPr algn="ctr">
-              <a:lnSpc>
-                <a:spcPct val="100000"/>
-              </a:lnSpc>
-              <a:buNone/>
-            </a:pPr>
-            <a:r>
-              <a:rPr lang="en-US" sz="8800" dirty="0">
-                <a:solidFill>
-                  <a:srgbClr val="FF0000"/>
-                </a:solidFill>
-                <a:cs typeface="Arial" panose="020B0604020202020204" pitchFamily="34" charset="0"/>
-              </a:rPr>
-              <a:t>VS BLOCO 39</a:t>
-            </a:r>
-          </a:p>
-          <a:p>
-            <a:pPr marL="36000" indent="-252000" algn="ctr">
-              <a:lnSpc>
-                <a:spcPct val="100000"/>
-              </a:lnSpc>
-              <a:spcBef>
-                <a:spcPts val="0"/>
-              </a:spcBef>
-              <a:buNone/>
-            </a:pPr>
-            <a:r>
-              <a:rPr lang="pt-BR" sz="7200" dirty="0"/>
-              <a:t>Loop de Marcha </a:t>
-            </a:r>
-            <a:r>
-              <a:rPr lang="pt-BR" sz="7200" dirty="0">
-                <a:solidFill>
-                  <a:srgbClr val="FF0000"/>
-                </a:solidFill>
-              </a:rPr>
-              <a:t>138 BPM</a:t>
-            </a:r>
-          </a:p>
-        </p:txBody>
-      </p:sp>
-    </p:spTree>
-  </p:cSld>
-  <p:clrMapOvr>
-    <a:masterClrMapping/>
-  </p:clrMapOvr>
-</p:sld>
-</file>
-
-<file path=ppt/slides/slide41.xml><?xml version="1.0" encoding="utf-8"?>
-<p:sld xmlns:a="http://schemas.openxmlformats.org/drawingml/2006/main" xmlns:r="http://schemas.openxmlformats.org/officeDocument/2006/relationships" xmlns:p="http://schemas.openxmlformats.org/presentationml/2006/main">
-  <p:cSld>
-    <p:spTree>
-      <p:nvGrpSpPr>
-        <p:cNvPr id="1" name=""/>
-        <p:cNvGrpSpPr/>
-        <p:nvPr/>
-      </p:nvGrpSpPr>
-      <p:grpSpPr>
-        <a:xfrm>
-          <a:off x="0" y="0"/>
-          <a:ext cx="0" cy="0"/>
-          <a:chOff x="0" y="0"/>
-          <a:chExt cx="0" cy="0"/>
-        </a:xfrm>
-      </p:grpSpPr>
-      <p:sp>
-        <p:nvSpPr>
-          <p:cNvPr id="3" name="Espaço Reservado para Conteúdo 2">
-            <a:extLst>
-              <a:ext uri="{FF2B5EF4-FFF2-40B4-BE49-F238E27FC236}">
-                <a16:creationId xmlns:a16="http://schemas.microsoft.com/office/drawing/2014/main" id="{7C70BAA2-54A1-BAA9-5EF9-9F93F22AE700}"/>
-              </a:ext>
-            </a:extLst>
-          </p:cNvPr>
-          <p:cNvSpPr>
-            <a:spLocks noGrp="1"/>
-          </p:cNvSpPr>
-          <p:nvPr>
-            <p:ph idx="1"/>
-          </p:nvPr>
-        </p:nvSpPr>
-        <p:spPr>
-          <a:xfrm>
-            <a:off x="10509" y="-3937"/>
-            <a:ext cx="12181491" cy="6861937"/>
-          </a:xfrm>
-        </p:spPr>
-        <p:txBody>
-          <a:bodyPr>
-            <a:noAutofit/>
-          </a:bodyPr>
-          <a:lstStyle/>
-          <a:p>
-            <a:pPr algn="ctr">
-              <a:lnSpc>
-                <a:spcPct val="100000"/>
-              </a:lnSpc>
-              <a:buNone/>
-            </a:pPr>
-            <a:r>
-              <a:rPr lang="en-US" sz="8800" dirty="0">
-                <a:solidFill>
-                  <a:srgbClr val="FF0000"/>
-                </a:solidFill>
-                <a:cs typeface="Arial" panose="020B0604020202020204" pitchFamily="34" charset="0"/>
-              </a:rPr>
-              <a:t>VS BLOCO 40</a:t>
-            </a:r>
-          </a:p>
-          <a:p>
-            <a:pPr marL="36000" indent="-252000" algn="ctr">
-              <a:lnSpc>
-                <a:spcPct val="100000"/>
-              </a:lnSpc>
-              <a:spcBef>
-                <a:spcPts val="0"/>
-              </a:spcBef>
-              <a:buNone/>
-            </a:pPr>
-            <a:r>
-              <a:rPr lang="pt-BR" sz="7200" dirty="0"/>
-              <a:t>Loop de Marcha </a:t>
-            </a:r>
-            <a:r>
-              <a:rPr lang="pt-BR" sz="7200" dirty="0">
-                <a:solidFill>
-                  <a:srgbClr val="FF0000"/>
-                </a:solidFill>
-              </a:rPr>
-              <a:t>140 BPM</a:t>
-            </a:r>
-          </a:p>
-        </p:txBody>
-      </p:sp>
-    </p:spTree>
-  </p:cSld>
-  <p:clrMapOvr>
-    <a:masterClrMapping/>
-  </p:clrMapOvr>
-</p:sld>
-</file>
-
-<file path=ppt/slides/slide42.xml><?xml version="1.0" encoding="utf-8"?>
-<p:sld xmlns:a="http://schemas.openxmlformats.org/drawingml/2006/main" xmlns:r="http://schemas.openxmlformats.org/officeDocument/2006/relationships" xmlns:p="http://schemas.openxmlformats.org/presentationml/2006/main">
-  <p:cSld>
-    <p:spTree>
-      <p:nvGrpSpPr>
-        <p:cNvPr id="1" name=""/>
-        <p:cNvGrpSpPr/>
-        <p:nvPr/>
-      </p:nvGrpSpPr>
-      <p:grpSpPr>
-        <a:xfrm>
-          <a:off x="0" y="0"/>
-          <a:ext cx="0" cy="0"/>
-          <a:chOff x="0" y="0"/>
-          <a:chExt cx="0" cy="0"/>
-        </a:xfrm>
-      </p:grpSpPr>
-      <p:sp>
-        <p:nvSpPr>
-          <p:cNvPr id="3" name="Espaço Reservado para Conteúdo 2">
-            <a:extLst>
-              <a:ext uri="{FF2B5EF4-FFF2-40B4-BE49-F238E27FC236}">
-                <a16:creationId xmlns:a16="http://schemas.microsoft.com/office/drawing/2014/main" id="{7C70BAA2-54A1-BAA9-5EF9-9F93F22AE700}"/>
-              </a:ext>
-            </a:extLst>
-          </p:cNvPr>
-          <p:cNvSpPr>
-            <a:spLocks noGrp="1"/>
-          </p:cNvSpPr>
-          <p:nvPr>
-            <p:ph idx="1"/>
-          </p:nvPr>
-        </p:nvSpPr>
-        <p:spPr>
-          <a:xfrm>
-            <a:off x="10509" y="-3937"/>
-            <a:ext cx="12181491" cy="6861937"/>
-          </a:xfrm>
-        </p:spPr>
-        <p:txBody>
-          <a:bodyPr>
-            <a:noAutofit/>
-          </a:bodyPr>
-          <a:lstStyle/>
-          <a:p>
-            <a:pPr algn="ctr">
-              <a:lnSpc>
-                <a:spcPct val="100000"/>
-              </a:lnSpc>
-              <a:buNone/>
-            </a:pPr>
-            <a:r>
-              <a:rPr lang="en-US" sz="8800" dirty="0">
-                <a:solidFill>
-                  <a:srgbClr val="FF0000"/>
-                </a:solidFill>
-                <a:cs typeface="Arial" panose="020B0604020202020204" pitchFamily="34" charset="0"/>
-              </a:rPr>
-              <a:t>VS BLOCO 41</a:t>
-            </a:r>
-          </a:p>
-          <a:p>
-            <a:pPr marL="36000" indent="-252000" algn="ctr">
-              <a:lnSpc>
-                <a:spcPct val="100000"/>
-              </a:lnSpc>
-              <a:spcBef>
-                <a:spcPts val="0"/>
-              </a:spcBef>
-              <a:buNone/>
-            </a:pPr>
-            <a:r>
-              <a:rPr lang="pt-BR" sz="7200" dirty="0"/>
-              <a:t>Click de Marcha </a:t>
-            </a:r>
-            <a:r>
-              <a:rPr lang="pt-BR" sz="7200" dirty="0">
-                <a:solidFill>
-                  <a:srgbClr val="FF0000"/>
-                </a:solidFill>
-              </a:rPr>
-              <a:t>135 BPM</a:t>
-            </a:r>
-          </a:p>
-        </p:txBody>
-      </p:sp>
-    </p:spTree>
-  </p:cSld>
-  <p:clrMapOvr>
-    <a:masterClrMapping/>
-  </p:clrMapOvr>
-</p:sld>
-</file>
-
-<file path=ppt/slides/slide43.xml><?xml version="1.0" encoding="utf-8"?>
-<p:sld xmlns:a="http://schemas.openxmlformats.org/drawingml/2006/main" xmlns:r="http://schemas.openxmlformats.org/officeDocument/2006/relationships" xmlns:p="http://schemas.openxmlformats.org/presentationml/2006/main">
-  <p:cSld>
-    <p:spTree>
-      <p:nvGrpSpPr>
-        <p:cNvPr id="1" name=""/>
-        <p:cNvGrpSpPr/>
-        <p:nvPr/>
-      </p:nvGrpSpPr>
-      <p:grpSpPr>
-        <a:xfrm>
-          <a:off x="0" y="0"/>
-          <a:ext cx="0" cy="0"/>
-          <a:chOff x="0" y="0"/>
-          <a:chExt cx="0" cy="0"/>
-        </a:xfrm>
-      </p:grpSpPr>
-      <p:sp>
-        <p:nvSpPr>
-          <p:cNvPr id="3" name="Espaço Reservado para Conteúdo 2">
-            <a:extLst>
-              <a:ext uri="{FF2B5EF4-FFF2-40B4-BE49-F238E27FC236}">
-                <a16:creationId xmlns:a16="http://schemas.microsoft.com/office/drawing/2014/main" id="{7C70BAA2-54A1-BAA9-5EF9-9F93F22AE700}"/>
-              </a:ext>
-            </a:extLst>
-          </p:cNvPr>
-          <p:cNvSpPr>
-            <a:spLocks noGrp="1"/>
-          </p:cNvSpPr>
-          <p:nvPr>
-            <p:ph idx="1"/>
-          </p:nvPr>
-        </p:nvSpPr>
-        <p:spPr>
-          <a:xfrm>
-            <a:off x="10509" y="-3937"/>
-            <a:ext cx="12181491" cy="6861937"/>
-          </a:xfrm>
-        </p:spPr>
-        <p:txBody>
-          <a:bodyPr>
-            <a:noAutofit/>
-          </a:bodyPr>
-          <a:lstStyle/>
-          <a:p>
-            <a:pPr algn="ctr">
-              <a:lnSpc>
-                <a:spcPct val="100000"/>
-              </a:lnSpc>
-              <a:buNone/>
-            </a:pPr>
-            <a:r>
-              <a:rPr lang="en-US" sz="8800" dirty="0">
-                <a:solidFill>
-                  <a:srgbClr val="FF0000"/>
-                </a:solidFill>
-                <a:cs typeface="Arial" panose="020B0604020202020204" pitchFamily="34" charset="0"/>
-              </a:rPr>
-              <a:t>VS BLOCO 42</a:t>
-            </a:r>
-          </a:p>
-          <a:p>
-            <a:pPr marL="36000" indent="-252000" algn="ctr">
-              <a:lnSpc>
-                <a:spcPct val="100000"/>
-              </a:lnSpc>
-              <a:spcBef>
-                <a:spcPts val="0"/>
-              </a:spcBef>
-              <a:buNone/>
-            </a:pPr>
-            <a:r>
-              <a:rPr lang="pt-BR" sz="7200" dirty="0"/>
-              <a:t>Click de Marcha </a:t>
-            </a:r>
-            <a:r>
-              <a:rPr lang="pt-BR" sz="7200" dirty="0">
-                <a:solidFill>
-                  <a:srgbClr val="FF0000"/>
-                </a:solidFill>
-              </a:rPr>
-              <a:t>138 BPM</a:t>
-            </a:r>
-          </a:p>
-        </p:txBody>
-      </p:sp>
-    </p:spTree>
-  </p:cSld>
-  <p:clrMapOvr>
-    <a:masterClrMapping/>
-  </p:clrMapOvr>
-</p:sld>
-</file>
-
-<file path=ppt/slides/slide44.xml><?xml version="1.0" encoding="utf-8"?>
-<p:sld xmlns:a="http://schemas.openxmlformats.org/drawingml/2006/main" xmlns:r="http://schemas.openxmlformats.org/officeDocument/2006/relationships" xmlns:p="http://schemas.openxmlformats.org/presentationml/2006/main">
-  <p:cSld>
-    <p:spTree>
-      <p:nvGrpSpPr>
-        <p:cNvPr id="1" name=""/>
-        <p:cNvGrpSpPr/>
-        <p:nvPr/>
-      </p:nvGrpSpPr>
-      <p:grpSpPr>
-        <a:xfrm>
-          <a:off x="0" y="0"/>
-          <a:ext cx="0" cy="0"/>
-          <a:chOff x="0" y="0"/>
-          <a:chExt cx="0" cy="0"/>
-        </a:xfrm>
-      </p:grpSpPr>
-      <p:sp>
-        <p:nvSpPr>
-          <p:cNvPr id="3" name="Espaço Reservado para Conteúdo 2">
-            <a:extLst>
-              <a:ext uri="{FF2B5EF4-FFF2-40B4-BE49-F238E27FC236}">
-                <a16:creationId xmlns:a16="http://schemas.microsoft.com/office/drawing/2014/main" id="{7C70BAA2-54A1-BAA9-5EF9-9F93F22AE700}"/>
-              </a:ext>
-            </a:extLst>
-          </p:cNvPr>
-          <p:cNvSpPr>
-            <a:spLocks noGrp="1"/>
-          </p:cNvSpPr>
-          <p:nvPr>
-            <p:ph idx="1"/>
-          </p:nvPr>
-        </p:nvSpPr>
-        <p:spPr>
-          <a:xfrm>
-            <a:off x="10509" y="-3937"/>
-            <a:ext cx="12181491" cy="6861937"/>
-          </a:xfrm>
-        </p:spPr>
-        <p:txBody>
-          <a:bodyPr>
-            <a:noAutofit/>
-          </a:bodyPr>
-          <a:lstStyle/>
-          <a:p>
-            <a:pPr algn="ctr">
-              <a:lnSpc>
-                <a:spcPct val="100000"/>
-              </a:lnSpc>
-              <a:buNone/>
-            </a:pPr>
-            <a:r>
-              <a:rPr lang="en-US" sz="8800" dirty="0">
-                <a:solidFill>
-                  <a:srgbClr val="FF0000"/>
-                </a:solidFill>
-                <a:cs typeface="Arial" panose="020B0604020202020204" pitchFamily="34" charset="0"/>
-              </a:rPr>
-              <a:t>VS BLOCO 43</a:t>
-            </a:r>
-          </a:p>
-          <a:p>
-            <a:pPr marL="36000" indent="-252000" algn="ctr">
-              <a:lnSpc>
-                <a:spcPct val="100000"/>
-              </a:lnSpc>
-              <a:spcBef>
-                <a:spcPts val="0"/>
-              </a:spcBef>
-              <a:buNone/>
-            </a:pPr>
-            <a:r>
-              <a:rPr lang="pt-BR" sz="7200" dirty="0"/>
-              <a:t>Click de Marcha </a:t>
-            </a:r>
-            <a:r>
-              <a:rPr lang="pt-BR" sz="7200" dirty="0">
-                <a:solidFill>
-                  <a:srgbClr val="FF0000"/>
-                </a:solidFill>
-              </a:rPr>
-              <a:t>140 BPM</a:t>
-            </a:r>
-          </a:p>
-        </p:txBody>
-      </p:sp>
-    </p:spTree>
   </p:cSld>
   <p:clrMapOvr>
     <a:masterClrMapping/>

--- a/REPERTÓRIO/Repertório Rota do Chopp - VS.pptx
+++ b/REPERTÓRIO/Repertório Rota do Chopp - VS.pptx
@@ -43,6 +43,7 @@
     <p:sldId id="477" r:id="rId34"/>
     <p:sldId id="481" r:id="rId43"/>
     <p:sldId id="482" r:id="rId44"/>
+    <p:sldId id="483" r:id="rId45"/>
   </p:sldIdLst>
   <p:sldSz cx="12192000" cy="6858000"/>
   <p:notesSz cx="6858000" cy="9144000"/>
@@ -10489,6 +10490,130 @@
 </p:sld>
 </file>
 
+<file path=ppt/slides/slide36.xml><?xml version="1.0" encoding="utf-8"?>
+<p:sld xmlns:a="http://schemas.openxmlformats.org/drawingml/2006/main" xmlns:r="http://schemas.openxmlformats.org/officeDocument/2006/relationships" xmlns:p="http://schemas.openxmlformats.org/presentationml/2006/main">
+  <p:cSld>
+    <p:spTree>
+      <p:nvGrpSpPr>
+        <p:cNvPr id="1" name=""/>
+        <p:cNvGrpSpPr/>
+        <p:nvPr/>
+      </p:nvGrpSpPr>
+      <p:grpSpPr>
+        <a:xfrm>
+          <a:off x="0" y="0"/>
+          <a:ext cx="0" cy="0"/>
+          <a:chOff x="0" y="0"/>
+          <a:chExt cx="0" cy="0"/>
+        </a:xfrm>
+      </p:grpSpPr>
+      <p:sp>
+        <p:nvSpPr>
+          <p:cNvPr id="3" name="Espaço Reservado para Conteúdo 2">
+            <a:extLst>
+              <a:ext uri="{FF2B5EF4-FFF2-40B4-BE49-F238E27FC236}">
+                <a16:creationId xmlns:a16="http://schemas.microsoft.com/office/drawing/2014/main" id="{7C70BAA2-54A1-BAA9-5EF9-9F93F22AE700}"/>
+              </a:ext>
+            </a:extLst>
+          </p:cNvPr>
+          <p:cNvSpPr>
+            <a:spLocks noGrp="1"/>
+          </p:cNvSpPr>
+          <p:nvPr>
+            <p:ph idx="1"/>
+          </p:nvPr>
+        </p:nvSpPr>
+        <p:spPr>
+          <a:xfrm>
+            <a:off x="10509" y="-3937"/>
+            <a:ext cx="12181491" cy="6861937"/>
+          </a:xfrm>
+        </p:spPr>
+        <p:txBody>
+          <a:bodyPr>
+            <a:noAutofit/>
+          </a:bodyPr>
+          <a:lstStyle/>
+          <a:p>
+            <a:pPr algn="ctr">
+              <a:lnSpc>
+                <a:spcPct val="100000"/>
+              </a:lnSpc>
+              <a:buNone/>
+            </a:pPr>
+            <a:r>
+              <a:rPr lang="en-US" sz="8800" dirty="0">
+                <a:solidFill>
+                  <a:srgbClr val="FF0000"/>
+                </a:solidFill>
+                <a:cs typeface="Arial" panose="020B0604020202020204" pitchFamily="34" charset="0"/>
+              </a:rPr>
+              <a:t>VS BLOCO 35</a:t>
+            </a:r>
+          </a:p>
+          <a:p>
+            <a:pPr marL="36000" indent="-252000" algn="ctr">
+              <a:lnSpc>
+                <a:spcPct val="100000"/>
+              </a:lnSpc>
+              <a:spcBef>
+                <a:spcPts val="0"/>
+              </a:spcBef>
+              <a:buNone/>
+            </a:pPr>
+            <a:r>
+              <a:rPr lang="pt-BR" sz="7200" dirty="0"/>
+              <a:t>Na Hora de Amar </a:t>
+            </a:r>
+            <a:r>
+              <a:rPr lang="pt-BR" sz="7200" dirty="0">
+                <a:solidFill>
+                  <a:srgbClr val="FF0000"/>
+                </a:solidFill>
+              </a:rPr>
+              <a:t>??</a:t>
+            </a:r>
+            <a:br>
+              <a:rPr lang="pt-BR" sz="7200" dirty="0"/>
+            </a:br>
+            <a:r>
+              <a:rPr lang="pt-BR" sz="7200" dirty="0"/>
+              <a:t>Página de Amigos </a:t>
+            </a:r>
+            <a:r>
+              <a:rPr lang="pt-BR" sz="7200" dirty="0">
+                <a:solidFill>
+                  <a:srgbClr val="FF0000"/>
+                </a:solidFill>
+              </a:rPr>
+              <a:t>??</a:t>
+            </a:r>
+            <a:br>
+              <a:rPr lang="pt-BR" sz="7200" dirty="0"/>
+            </a:br>
+            <a:r>
+              <a:rPr lang="pt-BR" sz="7200" dirty="0"/>
+              <a:t>Dormi na Praça </a:t>
+            </a:r>
+            <a:r>
+              <a:rPr lang="pt-BR" sz="7200" dirty="0">
+                <a:solidFill>
+                  <a:srgbClr val="FF0000"/>
+                </a:solidFill>
+              </a:rPr>
+              <a:t>??</a:t>
+            </a:r>
+          </a:p>
+        </p:txBody>
+      </p:sp>
+    </p:spTree>
+  </p:cSld>
+  <p:clrMapOvr>
+    <a:masterClrMapping/>
+  </p:clrMapOvr>
+</p:sld>
+</file>
+
 <file path=ppt/slides/slide4.xml><?xml version="1.0" encoding="utf-8"?>
 <p:sld xmlns:a="http://schemas.openxmlformats.org/drawingml/2006/main" xmlns:r="http://schemas.openxmlformats.org/officeDocument/2006/relationships" xmlns:p="http://schemas.openxmlformats.org/presentationml/2006/main">
   <p:cSld>

--- a/REPERTÓRIO/Repertório Rota do Chopp - VS.pptx
+++ b/REPERTÓRIO/Repertório Rota do Chopp - VS.pptx
@@ -10603,6 +10603,36 @@
               </a:rPr>
               <a:t>??</a:t>
             </a:r>
+            <a:br>
+              <a:rPr lang="pt-BR" sz="7200" dirty="0"/>
+            </a:br>
+            <a:r>
+              <a:rPr lang="pt-BR" sz="7200" dirty="0"/>
+              <a:t>Temporal de Amor </a:t>
+            </a:r>
+            <a:r>
+              <a:rPr lang="pt-BR" sz="7200" dirty="0">
+                <a:solidFill>
+                  <a:srgbClr val="FF0000"/>
+                </a:solidFill>
+              </a:rPr>
+              <a:t>??</a:t>
+            </a:r>
+            <a:br>
+              <a:rPr lang="pt-BR" sz="7200" dirty="0"/>
+            </a:br>
+            <a:r>
+              <a:rPr lang="pt-BR" sz="7200" dirty="0"/>
+              <a:t>Evidências </a:t>
+            </a:r>
+            <a:r>
+              <a:rPr lang="pt-BR" sz="7200" dirty="0">
+                <a:solidFill>
+                  <a:srgbClr val="FF0000"/>
+                </a:solidFill>
+              </a:rPr>
+              <a:t>??</a:t>
+            </a:r>
           </a:p>
         </p:txBody>
       </p:sp>

--- a/REPERTÓRIO/Repertório Rota do Chopp - VS.pptx
+++ b/REPERTÓRIO/Repertório Rota do Chopp - VS.pptx
@@ -44,6 +44,7 @@
     <p:sldId id="481" r:id="rId43"/>
     <p:sldId id="482" r:id="rId44"/>
     <p:sldId id="483" r:id="rId45"/>
+    <p:sldId id="484" r:id="rId46"/>
   </p:sldIdLst>
   <p:sldSz cx="12192000" cy="6858000"/>
   <p:notesSz cx="6858000" cy="9144000"/>
@@ -6408,6 +6409,14 @@
 <file path=ppt/slides/slide10.xml><?xml version="1.0" encoding="utf-8"?>
 <p:sld xmlns:a="http://schemas.openxmlformats.org/drawingml/2006/main" xmlns:r="http://schemas.openxmlformats.org/officeDocument/2006/relationships" xmlns:p="http://schemas.openxmlformats.org/presentationml/2006/main">
   <p:cSld>
+    <p:bg>
+      <p:bgPr>
+        <a:solidFill>
+          <a:srgbClr val="000000"/>
+        </a:solidFill>
+        <a:effectLst/>
+      </p:bgPr>
+    </p:bg>
     <p:spTree>
       <p:nvGrpSpPr>
         <p:cNvPr id="1" name="">
@@ -6471,6 +6480,15 @@
               </a:rPr>
               <a:t>VS BLOCO 9</a:t>
             </a:r>
+            <a:r>
+              <a:rPr lang="pt-BR" sz="4800" baseline="41667" dirty="0">
+                <a:solidFill>
+                  <a:srgbClr val="FFFFFF"/>
+                </a:solidFill>
+                <a:cs typeface="Arial" panose="020B0604020202020204" pitchFamily="34" charset="0"/>
+              </a:rPr>
+              <a:t>  142 BPM</a:t>
+            </a:r>
           </a:p>
           <a:p>
             <a:pPr marL="36000" indent="-252000" algn="ctr">
@@ -6484,18 +6502,27 @@
             </a:pPr>
             <a:r>
               <a:rPr lang="en-US" sz="7200" dirty="0">
+                <a:solidFill>
+                  <a:srgbClr val="FFFFFF"/>
+                </a:solidFill>
                 <a:cs typeface="Arial" panose="020B0604020202020204" pitchFamily="34" charset="0"/>
               </a:rPr>
               <a:t>Ele </a:t>
             </a:r>
             <a:r>
               <a:rPr lang="en-US" sz="7200" dirty="0" err="1">
+                <a:solidFill>
+                  <a:srgbClr val="FFFFFF"/>
+                </a:solidFill>
                 <a:cs typeface="Arial" panose="020B0604020202020204" pitchFamily="34" charset="0"/>
               </a:rPr>
               <a:t>te</a:t>
             </a:r>
             <a:r>
               <a:rPr lang="en-US" sz="7200" dirty="0">
+                <a:solidFill>
+                  <a:srgbClr val="FFFFFF"/>
+                </a:solidFill>
                 <a:cs typeface="Arial" panose="020B0604020202020204" pitchFamily="34" charset="0"/>
               </a:rPr>
               <a:t> Trai </a:t>
@@ -6522,18 +6549,27 @@
             </a:pPr>
             <a:r>
               <a:rPr lang="en-US" sz="7200" dirty="0">
+                <a:solidFill>
+                  <a:srgbClr val="FFFFFF"/>
+                </a:solidFill>
                 <a:cs typeface="Arial" panose="020B0604020202020204" pitchFamily="34" charset="0"/>
               </a:rPr>
               <a:t>Cama </a:t>
             </a:r>
             <a:r>
               <a:rPr lang="en-US" sz="7200" dirty="0" err="1">
+                <a:solidFill>
+                  <a:srgbClr val="FFFFFF"/>
+                </a:solidFill>
                 <a:cs typeface="Arial" panose="020B0604020202020204" pitchFamily="34" charset="0"/>
               </a:rPr>
               <a:t>Vazia</a:t>
             </a:r>
             <a:r>
               <a:rPr lang="en-US" sz="7200" dirty="0">
+                <a:solidFill>
+                  <a:srgbClr val="FFFFFF"/>
+                </a:solidFill>
                 <a:cs typeface="Arial" panose="020B0604020202020204" pitchFamily="34" charset="0"/>
               </a:rPr>
               <a:t> </a:t>
@@ -6560,6 +6596,9 @@
             </a:pPr>
             <a:r>
               <a:rPr lang="en-US" sz="7200" dirty="0">
+                <a:solidFill>
+                  <a:srgbClr val="FFFFFF"/>
+                </a:solidFill>
                 <a:cs typeface="Arial" panose="020B0604020202020204" pitchFamily="34" charset="0"/>
               </a:rPr>
               <a:t>Meu Ex Amor </a:t>
@@ -6612,6 +6651,14 @@
 <file path=ppt/slides/slide11.xml><?xml version="1.0" encoding="utf-8"?>
 <p:sld xmlns:a="http://schemas.openxmlformats.org/drawingml/2006/main" xmlns:r="http://schemas.openxmlformats.org/officeDocument/2006/relationships" xmlns:p="http://schemas.openxmlformats.org/presentationml/2006/main">
   <p:cSld>
+    <p:bg>
+      <p:bgPr>
+        <a:solidFill>
+          <a:srgbClr val="000000"/>
+        </a:solidFill>
+        <a:effectLst/>
+      </p:bgPr>
+    </p:bg>
     <p:spTree>
       <p:nvGrpSpPr>
         <p:cNvPr id="1" name="">
@@ -6675,6 +6722,15 @@
               </a:rPr>
               <a:t>VS BLOCO 10</a:t>
             </a:r>
+            <a:r>
+              <a:rPr lang="pt-BR" sz="4800" baseline="41667" dirty="0">
+                <a:solidFill>
+                  <a:srgbClr val="FFFFFF"/>
+                </a:solidFill>
+                <a:cs typeface="Arial" panose="020B0604020202020204" pitchFamily="34" charset="0"/>
+              </a:rPr>
+              <a:t>  134 BPM</a:t>
+            </a:r>
           </a:p>
           <a:p>
             <a:pPr marL="36000" indent="-252000" algn="ctr">
@@ -6687,7 +6743,11 @@
               <a:buNone/>
             </a:pPr>
             <a:r>
-              <a:rPr lang="pt-BR" sz="7200" dirty="0"/>
+              <a:rPr lang="pt-BR" sz="7200" dirty="0">
+                <a:solidFill>
+                  <a:srgbClr val="FFFFFF"/>
+                </a:solidFill>
+              </a:rPr>
               <a:t>Fim De Semana </a:t>
             </a:r>
             <a:r>
@@ -6702,7 +6762,11 @@
               <a:rPr lang="pt-BR" sz="7200" dirty="0"/>
             </a:br>
             <a:r>
-              <a:rPr lang="pt-BR" sz="7200" dirty="0"/>
+              <a:rPr lang="pt-BR" sz="7200" dirty="0">
+                <a:solidFill>
+                  <a:srgbClr val="FFFFFF"/>
+                </a:solidFill>
+              </a:rPr>
               <a:t>Gosto Que Me Enrosco </a:t>
             </a:r>
             <a:r>
@@ -6717,7 +6781,11 @@
               <a:rPr lang="pt-BR" sz="7200" dirty="0"/>
             </a:br>
             <a:r>
-              <a:rPr lang="pt-BR" sz="7200" dirty="0"/>
+              <a:rPr lang="pt-BR" sz="7200" dirty="0">
+                <a:solidFill>
+                  <a:srgbClr val="FFFFFF"/>
+                </a:solidFill>
+              </a:rPr>
               <a:t>Novela Das 8 </a:t>
             </a:r>
             <a:r>
@@ -6753,6 +6821,14 @@
 <file path=ppt/slides/slide12.xml><?xml version="1.0" encoding="utf-8"?>
 <p:sld xmlns:a="http://schemas.openxmlformats.org/drawingml/2006/main" xmlns:r="http://schemas.openxmlformats.org/officeDocument/2006/relationships" xmlns:p="http://schemas.openxmlformats.org/presentationml/2006/main">
   <p:cSld>
+    <p:bg>
+      <p:bgPr>
+        <a:solidFill>
+          <a:srgbClr val="000000"/>
+        </a:solidFill>
+        <a:effectLst/>
+      </p:bgPr>
+    </p:bg>
     <p:spTree>
       <p:nvGrpSpPr>
         <p:cNvPr id="1" name="">
@@ -6816,6 +6892,15 @@
               </a:rPr>
               <a:t>VS BLOCO 11</a:t>
             </a:r>
+            <a:r>
+              <a:rPr lang="pt-BR" sz="4800" baseline="41667" dirty="0">
+                <a:solidFill>
+                  <a:srgbClr val="FFFFFF"/>
+                </a:solidFill>
+                <a:cs typeface="Arial" panose="020B0604020202020204" pitchFamily="34" charset="0"/>
+              </a:rPr>
+              <a:t>  140 BPM</a:t>
+            </a:r>
           </a:p>
           <a:p>
             <a:pPr marL="36000" indent="-252000" algn="ctr">
@@ -6828,7 +6913,11 @@
               <a:buNone/>
             </a:pPr>
             <a:r>
-              <a:rPr lang="pt-BR" sz="5400" dirty="0"/>
+              <a:rPr lang="pt-BR" sz="5400" dirty="0">
+                <a:solidFill>
+                  <a:srgbClr val="FFFFFF"/>
+                </a:solidFill>
+              </a:rPr>
               <a:t>Garçom </a:t>
             </a:r>
             <a:r>
@@ -6843,7 +6932,11 @@
               <a:rPr lang="pt-BR" sz="5400" dirty="0"/>
             </a:br>
             <a:r>
-              <a:rPr lang="pt-BR" sz="5400" dirty="0"/>
+              <a:rPr lang="pt-BR" sz="5400" dirty="0">
+                <a:solidFill>
+                  <a:srgbClr val="FFFFFF"/>
+                </a:solidFill>
+              </a:rPr>
               <a:t>Ninguém Segura o Coração </a:t>
             </a:r>
             <a:r>
@@ -6858,7 +6951,11 @@
               <a:rPr lang="pt-BR" sz="5400" dirty="0"/>
             </a:br>
             <a:r>
-              <a:rPr lang="pt-BR" sz="5400" dirty="0"/>
+              <a:rPr lang="pt-BR" sz="5400" dirty="0">
+                <a:solidFill>
+                  <a:srgbClr val="FFFFFF"/>
+                </a:solidFill>
+              </a:rPr>
               <a:t>Misturinha </a:t>
             </a:r>
             <a:r>
@@ -6873,7 +6970,11 @@
               <a:rPr lang="pt-BR" sz="5400" dirty="0"/>
             </a:br>
             <a:r>
-              <a:rPr lang="pt-BR" sz="5400" dirty="0"/>
+              <a:rPr lang="pt-BR" sz="5400" dirty="0">
+                <a:solidFill>
+                  <a:srgbClr val="FFFFFF"/>
+                </a:solidFill>
+              </a:rPr>
               <a:t>Essa Cama Eu Não Vendo </a:t>
             </a:r>
             <a:r>
@@ -6888,7 +6989,11 @@
               <a:rPr lang="pt-BR" sz="5400" dirty="0"/>
             </a:br>
             <a:r>
-              <a:rPr lang="pt-BR" sz="5400" dirty="0"/>
+              <a:rPr lang="pt-BR" sz="5400" dirty="0">
+                <a:solidFill>
+                  <a:srgbClr val="FFFFFF"/>
+                </a:solidFill>
+              </a:rPr>
               <a:t>Preciso Te Falar </a:t>
             </a:r>
             <a:r>
@@ -6903,7 +7008,11 @@
               <a:rPr lang="pt-BR" sz="5400" dirty="0"/>
             </a:br>
             <a:r>
-              <a:rPr lang="pt-BR" sz="5400" dirty="0"/>
+              <a:rPr lang="pt-BR" sz="5400" dirty="0">
+                <a:solidFill>
+                  <a:srgbClr val="FFFFFF"/>
+                </a:solidFill>
+              </a:rPr>
               <a:t>Flashback </a:t>
             </a:r>
             <a:r>
@@ -6939,6 +7048,14 @@
 <file path=ppt/slides/slide13.xml><?xml version="1.0" encoding="utf-8"?>
 <p:sld xmlns:a="http://schemas.openxmlformats.org/drawingml/2006/main" xmlns:r="http://schemas.openxmlformats.org/officeDocument/2006/relationships" xmlns:p="http://schemas.openxmlformats.org/presentationml/2006/main">
   <p:cSld>
+    <p:bg>
+      <p:bgPr>
+        <a:solidFill>
+          <a:srgbClr val="000000"/>
+        </a:solidFill>
+        <a:effectLst/>
+      </p:bgPr>
+    </p:bg>
     <p:spTree>
       <p:nvGrpSpPr>
         <p:cNvPr id="1" name="">
@@ -7002,6 +7119,15 @@
               </a:rPr>
               <a:t>VS BLOCO 12</a:t>
             </a:r>
+            <a:r>
+              <a:rPr lang="pt-BR" sz="4800" baseline="41667" dirty="0">
+                <a:solidFill>
+                  <a:srgbClr val="FFFFFF"/>
+                </a:solidFill>
+                <a:cs typeface="Arial" panose="020B0604020202020204" pitchFamily="34" charset="0"/>
+              </a:rPr>
+              <a:t>  137 BPM</a:t>
+            </a:r>
           </a:p>
           <a:p>
             <a:pPr marL="36000" indent="-252000" algn="ctr">
@@ -7014,7 +7140,11 @@
               <a:buNone/>
             </a:pPr>
             <a:r>
-              <a:rPr lang="pt-BR" sz="7200" dirty="0"/>
+              <a:rPr lang="pt-BR" sz="7200" dirty="0">
+                <a:solidFill>
+                  <a:srgbClr val="FFFFFF"/>
+                </a:solidFill>
+              </a:rPr>
               <a:t>Guardanapo </a:t>
             </a:r>
             <a:r>
@@ -7042,7 +7172,11 @@
               <a:buNone/>
             </a:pPr>
             <a:r>
-              <a:rPr lang="pt-BR" sz="7200" dirty="0"/>
+              <a:rPr lang="pt-BR" sz="7200" dirty="0">
+                <a:solidFill>
+                  <a:srgbClr val="FFFFFF"/>
+                </a:solidFill>
+              </a:rPr>
               <a:t>Transgênica </a:t>
             </a:r>
             <a:r>
@@ -7057,7 +7191,11 @@
               <a:rPr lang="pt-BR" sz="7200" dirty="0"/>
             </a:br>
             <a:r>
-              <a:rPr lang="pt-BR" sz="7200" dirty="0"/>
+              <a:rPr lang="pt-BR" sz="7200" dirty="0">
+                <a:solidFill>
+                  <a:srgbClr val="FFFFFF"/>
+                </a:solidFill>
+              </a:rPr>
               <a:t>Caso Marcado </a:t>
             </a:r>
             <a:r>
@@ -7093,6 +7231,14 @@
 <file path=ppt/slides/slide14.xml><?xml version="1.0" encoding="utf-8"?>
 <p:sld xmlns:a="http://schemas.openxmlformats.org/drawingml/2006/main" xmlns:r="http://schemas.openxmlformats.org/officeDocument/2006/relationships" xmlns:p="http://schemas.openxmlformats.org/presentationml/2006/main">
   <p:cSld>
+    <p:bg>
+      <p:bgPr>
+        <a:solidFill>
+          <a:srgbClr val="000000"/>
+        </a:solidFill>
+        <a:effectLst/>
+      </p:bgPr>
+    </p:bg>
     <p:spTree>
       <p:nvGrpSpPr>
         <p:cNvPr id="1" name="">
@@ -7156,6 +7302,15 @@
               </a:rPr>
               <a:t>VS BLOCO 13</a:t>
             </a:r>
+            <a:r>
+              <a:rPr lang="pt-BR" sz="4800" baseline="41667" dirty="0">
+                <a:solidFill>
+                  <a:srgbClr val="FFFFFF"/>
+                </a:solidFill>
+                <a:cs typeface="Arial" panose="020B0604020202020204" pitchFamily="34" charset="0"/>
+              </a:rPr>
+              <a:t>  136 BPM</a:t>
+            </a:r>
           </a:p>
           <a:p>
             <a:pPr marL="36000" indent="-252000" algn="ctr">
@@ -7168,7 +7323,11 @@
               <a:buNone/>
             </a:pPr>
             <a:r>
-              <a:rPr lang="pt-BR" sz="7200" dirty="0"/>
+              <a:rPr lang="pt-BR" sz="7200" dirty="0">
+                <a:solidFill>
+                  <a:srgbClr val="FFFFFF"/>
+                </a:solidFill>
+              </a:rPr>
               <a:t>Lágrimas Sobre a Mesa </a:t>
             </a:r>
             <a:r>
@@ -7183,7 +7342,11 @@
               <a:rPr lang="pt-BR" sz="7200" dirty="0"/>
             </a:br>
             <a:r>
-              <a:rPr lang="pt-BR" sz="7200" dirty="0"/>
+              <a:rPr lang="pt-BR" sz="7200" dirty="0">
+                <a:solidFill>
+                  <a:srgbClr val="FFFFFF"/>
+                </a:solidFill>
+              </a:rPr>
               <a:t>Página Virada </a:t>
             </a:r>
             <a:r>
@@ -7198,7 +7361,11 @@
               <a:rPr lang="pt-BR" sz="7200" dirty="0"/>
             </a:br>
             <a:r>
-              <a:rPr lang="pt-BR" sz="7200" dirty="0"/>
+              <a:rPr lang="pt-BR" sz="7200" dirty="0">
+                <a:solidFill>
+                  <a:srgbClr val="FFFFFF"/>
+                </a:solidFill>
+              </a:rPr>
               <a:t>Fique </a:t>
             </a:r>
             <a:r>
@@ -7234,6 +7401,14 @@
 <file path=ppt/slides/slide15.xml><?xml version="1.0" encoding="utf-8"?>
 <p:sld xmlns:a="http://schemas.openxmlformats.org/drawingml/2006/main" xmlns:r="http://schemas.openxmlformats.org/officeDocument/2006/relationships" xmlns:p="http://schemas.openxmlformats.org/presentationml/2006/main">
   <p:cSld>
+    <p:bg>
+      <p:bgPr>
+        <a:solidFill>
+          <a:srgbClr val="000000"/>
+        </a:solidFill>
+        <a:effectLst/>
+      </p:bgPr>
+    </p:bg>
     <p:spTree>
       <p:nvGrpSpPr>
         <p:cNvPr id="1" name="">
@@ -7297,6 +7472,15 @@
               </a:rPr>
               <a:t>VS BLOCO 14</a:t>
             </a:r>
+            <a:r>
+              <a:rPr lang="pt-BR" sz="4800" baseline="41667" dirty="0">
+                <a:solidFill>
+                  <a:srgbClr val="FFFFFF"/>
+                </a:solidFill>
+                <a:cs typeface="Arial" panose="020B0604020202020204" pitchFamily="34" charset="0"/>
+              </a:rPr>
+              <a:t>  138 BPM</a:t>
+            </a:r>
           </a:p>
           <a:p>
             <a:pPr marL="36000" indent="-252000" algn="ctr">
@@ -7309,31 +7493,59 @@
               <a:buNone/>
             </a:pPr>
             <a:r>
-              <a:rPr lang="pt-BR" sz="7200" dirty="0"/>
+              <a:rPr lang="pt-BR" sz="7200" dirty="0">
+                <a:solidFill>
+                  <a:srgbClr val="FFFFFF"/>
+                </a:solidFill>
+              </a:rPr>
               <a:t>Maria </a:t>
             </a:r>
             <a:r>
-              <a:rPr lang="pt-BR" sz="7200" dirty="0" err="1"/>
+              <a:rPr lang="pt-BR" sz="7200" dirty="0" err="1">
+                <a:solidFill>
+                  <a:srgbClr val="FFFFFF"/>
+                </a:solidFill>
+              </a:rPr>
               <a:t>Tcha</a:t>
             </a:r>
             <a:r>
-              <a:rPr lang="pt-BR" sz="7200" dirty="0"/>
+              <a:rPr lang="pt-BR" sz="7200" dirty="0">
+                <a:solidFill>
+                  <a:srgbClr val="FFFFFF"/>
+                </a:solidFill>
+              </a:rPr>
               <a:t> </a:t>
             </a:r>
             <a:r>
-              <a:rPr lang="pt-BR" sz="7200" dirty="0" err="1"/>
+              <a:rPr lang="pt-BR" sz="7200" dirty="0" err="1">
+                <a:solidFill>
+                  <a:srgbClr val="FFFFFF"/>
+                </a:solidFill>
+              </a:rPr>
               <a:t>Tcha</a:t>
             </a:r>
             <a:r>
-              <a:rPr lang="pt-BR" sz="7200" dirty="0"/>
+              <a:rPr lang="pt-BR" sz="7200" dirty="0">
+                <a:solidFill>
+                  <a:srgbClr val="FFFFFF"/>
+                </a:solidFill>
+              </a:rPr>
               <a:t> </a:t>
             </a:r>
             <a:r>
-              <a:rPr lang="pt-BR" sz="7200" dirty="0" err="1"/>
+              <a:rPr lang="pt-BR" sz="7200" dirty="0" err="1">
+                <a:solidFill>
+                  <a:srgbClr val="FFFFFF"/>
+                </a:solidFill>
+              </a:rPr>
               <a:t>Tcha</a:t>
             </a:r>
             <a:r>
-              <a:rPr lang="pt-BR" sz="7200" dirty="0"/>
+              <a:rPr lang="pt-BR" sz="7200" dirty="0">
+                <a:solidFill>
+                  <a:srgbClr val="FFFFFF"/>
+                </a:solidFill>
+              </a:rPr>
               <a:t> </a:t>
             </a:r>
             <a:r>
@@ -7348,7 +7560,11 @@
               <a:rPr lang="pt-BR" sz="7200" dirty="0"/>
             </a:br>
             <a:r>
-              <a:rPr lang="pt-BR" sz="7200" dirty="0"/>
+              <a:rPr lang="pt-BR" sz="7200" dirty="0">
+                <a:solidFill>
+                  <a:srgbClr val="FFFFFF"/>
+                </a:solidFill>
+              </a:rPr>
               <a:t>Preciso Te Encontrar </a:t>
             </a:r>
             <a:r>
@@ -7363,7 +7579,11 @@
               <a:rPr lang="pt-BR" sz="7200" dirty="0"/>
             </a:br>
             <a:r>
-              <a:rPr lang="pt-BR" sz="7200" dirty="0"/>
+              <a:rPr lang="pt-BR" sz="7200" dirty="0">
+                <a:solidFill>
+                  <a:srgbClr val="FFFFFF"/>
+                </a:solidFill>
+              </a:rPr>
               <a:t>Você Vai Ver </a:t>
             </a:r>
             <a:r>
@@ -7399,6 +7619,14 @@
 <file path=ppt/slides/slide16.xml><?xml version="1.0" encoding="utf-8"?>
 <p:sld xmlns:a="http://schemas.openxmlformats.org/drawingml/2006/main" xmlns:r="http://schemas.openxmlformats.org/officeDocument/2006/relationships" xmlns:p="http://schemas.openxmlformats.org/presentationml/2006/main">
   <p:cSld>
+    <p:bg>
+      <p:bgPr>
+        <a:solidFill>
+          <a:srgbClr val="000000"/>
+        </a:solidFill>
+        <a:effectLst/>
+      </p:bgPr>
+    </p:bg>
     <p:spTree>
       <p:nvGrpSpPr>
         <p:cNvPr id="1" name="">
@@ -7462,6 +7690,15 @@
               </a:rPr>
               <a:t>VS BLOCO 15</a:t>
             </a:r>
+            <a:r>
+              <a:rPr lang="pt-BR" sz="4800" baseline="41667" dirty="0">
+                <a:solidFill>
+                  <a:srgbClr val="FFFFFF"/>
+                </a:solidFill>
+                <a:cs typeface="Arial" panose="020B0604020202020204" pitchFamily="34" charset="0"/>
+              </a:rPr>
+              <a:t>  188 / 196 BPM</a:t>
+            </a:r>
           </a:p>
           <a:p>
             <a:pPr marL="36000" indent="-252000" algn="ctr">
@@ -7474,7 +7711,11 @@
               <a:buNone/>
             </a:pPr>
             <a:r>
-              <a:rPr lang="pt-BR" sz="7200" dirty="0"/>
+              <a:rPr lang="pt-BR" sz="7200" dirty="0">
+                <a:solidFill>
+                  <a:srgbClr val="FFFFFF"/>
+                </a:solidFill>
+              </a:rPr>
               <a:t>Mineirinho </a:t>
             </a:r>
             <a:r>
@@ -7489,7 +7730,11 @@
               <a:rPr lang="pt-BR" sz="7200" dirty="0"/>
             </a:br>
             <a:r>
-              <a:rPr lang="pt-BR" sz="7200" dirty="0"/>
+              <a:rPr lang="pt-BR" sz="7200" dirty="0">
+                <a:solidFill>
+                  <a:srgbClr val="FFFFFF"/>
+                </a:solidFill>
+              </a:rPr>
               <a:t>Cheia De Manias </a:t>
             </a:r>
             <a:r>
@@ -7504,7 +7749,11 @@
               <a:rPr lang="pt-BR" sz="7200" dirty="0"/>
             </a:br>
             <a:r>
-              <a:rPr lang="pt-BR" sz="7200" dirty="0"/>
+              <a:rPr lang="pt-BR" sz="7200" dirty="0">
+                <a:solidFill>
+                  <a:srgbClr val="FFFFFF"/>
+                </a:solidFill>
+              </a:rPr>
               <a:t>Deus Me Livre </a:t>
             </a:r>
             <a:r>
@@ -7540,6 +7789,14 @@
 <file path=ppt/slides/slide17.xml><?xml version="1.0" encoding="utf-8"?>
 <p:sld xmlns:a="http://schemas.openxmlformats.org/drawingml/2006/main" xmlns:r="http://schemas.openxmlformats.org/officeDocument/2006/relationships" xmlns:p="http://schemas.openxmlformats.org/presentationml/2006/main">
   <p:cSld>
+    <p:bg>
+      <p:bgPr>
+        <a:solidFill>
+          <a:srgbClr val="000000"/>
+        </a:solidFill>
+        <a:effectLst/>
+      </p:bgPr>
+    </p:bg>
     <p:spTree>
       <p:nvGrpSpPr>
         <p:cNvPr id="1" name="">
@@ -7603,6 +7860,15 @@
               </a:rPr>
               <a:t>VS BLOCO 16</a:t>
             </a:r>
+            <a:r>
+              <a:rPr lang="pt-BR" sz="4800" baseline="41667" dirty="0">
+                <a:solidFill>
+                  <a:srgbClr val="FFFFFF"/>
+                </a:solidFill>
+                <a:cs typeface="Arial" panose="020B0604020202020204" pitchFamily="34" charset="0"/>
+              </a:rPr>
+              <a:t>  180 BPM</a:t>
+            </a:r>
           </a:p>
           <a:p>
             <a:pPr marL="36000" indent="-252000" algn="ctr">
@@ -7615,7 +7881,11 @@
               <a:buNone/>
             </a:pPr>
             <a:r>
-              <a:rPr lang="pt-BR" sz="7200" dirty="0"/>
+              <a:rPr lang="pt-BR" sz="7200" dirty="0">
+                <a:solidFill>
+                  <a:srgbClr val="FFFFFF"/>
+                </a:solidFill>
+              </a:rPr>
               <a:t>Nosso Amor Terminou </a:t>
             </a:r>
             <a:r>
@@ -7630,7 +7900,11 @@
               <a:rPr lang="pt-BR" sz="7200" dirty="0"/>
             </a:br>
             <a:r>
-              <a:rPr lang="pt-BR" sz="7200" dirty="0"/>
+              <a:rPr lang="pt-BR" sz="7200" dirty="0">
+                <a:solidFill>
+                  <a:srgbClr val="FFFFFF"/>
+                </a:solidFill>
+              </a:rPr>
               <a:t>Assino Com X </a:t>
             </a:r>
             <a:r>
@@ -7666,6 +7940,14 @@
 <file path=ppt/slides/slide18.xml><?xml version="1.0" encoding="utf-8"?>
 <p:sld xmlns:a="http://schemas.openxmlformats.org/drawingml/2006/main" xmlns:r="http://schemas.openxmlformats.org/officeDocument/2006/relationships" xmlns:p="http://schemas.openxmlformats.org/presentationml/2006/main">
   <p:cSld>
+    <p:bg>
+      <p:bgPr>
+        <a:solidFill>
+          <a:srgbClr val="000000"/>
+        </a:solidFill>
+        <a:effectLst/>
+      </p:bgPr>
+    </p:bg>
     <p:spTree>
       <p:nvGrpSpPr>
         <p:cNvPr id="1" name="">
@@ -7729,6 +8011,15 @@
               </a:rPr>
               <a:t>VS BLOCO 17</a:t>
             </a:r>
+            <a:r>
+              <a:rPr lang="pt-BR" sz="4800" baseline="41667" dirty="0">
+                <a:solidFill>
+                  <a:srgbClr val="FFFFFF"/>
+                </a:solidFill>
+                <a:cs typeface="Arial" panose="020B0604020202020204" pitchFamily="34" charset="0"/>
+              </a:rPr>
+              <a:t>  136 BPM</a:t>
+            </a:r>
           </a:p>
           <a:p>
             <a:pPr marL="36000" indent="-252000" algn="ctr">
@@ -7742,6 +8033,9 @@
             </a:pPr>
             <a:r>
               <a:rPr lang="en-US" sz="7200" dirty="0">
+                <a:solidFill>
+                  <a:srgbClr val="FFFFFF"/>
+                </a:solidFill>
                 <a:cs typeface="Arial" panose="020B0604020202020204" pitchFamily="34" charset="0"/>
               </a:rPr>
               <a:t>Novela das 8 </a:t>
@@ -7768,12 +8062,18 @@
             </a:pPr>
             <a:r>
               <a:rPr lang="en-US" sz="7200" dirty="0" err="1">
+                <a:solidFill>
+                  <a:srgbClr val="FFFFFF"/>
+                </a:solidFill>
                 <a:cs typeface="Arial" panose="020B0604020202020204" pitchFamily="34" charset="0"/>
               </a:rPr>
               <a:t>Melô</a:t>
             </a:r>
             <a:r>
               <a:rPr lang="en-US" sz="7200" dirty="0">
+                <a:solidFill>
+                  <a:srgbClr val="FFFFFF"/>
+                </a:solidFill>
                 <a:cs typeface="Arial" panose="020B0604020202020204" pitchFamily="34" charset="0"/>
               </a:rPr>
               <a:t> do Rolo </a:t>
@@ -7800,24 +8100,36 @@
             </a:pPr>
             <a:r>
               <a:rPr lang="en-US" sz="7200" dirty="0" err="1">
+                <a:solidFill>
+                  <a:srgbClr val="FFFFFF"/>
+                </a:solidFill>
                 <a:cs typeface="Arial" panose="020B0604020202020204" pitchFamily="34" charset="0"/>
               </a:rPr>
               <a:t>Heyo</a:t>
             </a:r>
             <a:r>
               <a:rPr lang="en-US" sz="7200" dirty="0">
+                <a:solidFill>
+                  <a:srgbClr val="FFFFFF"/>
+                </a:solidFill>
                 <a:cs typeface="Arial" panose="020B0604020202020204" pitchFamily="34" charset="0"/>
               </a:rPr>
               <a:t> </a:t>
             </a:r>
             <a:r>
               <a:rPr lang="en-US" sz="7200" dirty="0" err="1">
+                <a:solidFill>
+                  <a:srgbClr val="FFFFFF"/>
+                </a:solidFill>
                 <a:cs typeface="Arial" panose="020B0604020202020204" pitchFamily="34" charset="0"/>
               </a:rPr>
               <a:t>Heyo</a:t>
             </a:r>
             <a:r>
               <a:rPr lang="en-US" sz="7200" dirty="0">
+                <a:solidFill>
+                  <a:srgbClr val="FFFFFF"/>
+                </a:solidFill>
                 <a:cs typeface="Arial" panose="020B0604020202020204" pitchFamily="34" charset="0"/>
               </a:rPr>
               <a:t> </a:t>
@@ -7870,6 +8182,14 @@
 <file path=ppt/slides/slide19.xml><?xml version="1.0" encoding="utf-8"?>
 <p:sld xmlns:a="http://schemas.openxmlformats.org/drawingml/2006/main" xmlns:r="http://schemas.openxmlformats.org/officeDocument/2006/relationships" xmlns:p="http://schemas.openxmlformats.org/presentationml/2006/main">
   <p:cSld>
+    <p:bg>
+      <p:bgPr>
+        <a:solidFill>
+          <a:srgbClr val="000000"/>
+        </a:solidFill>
+        <a:effectLst/>
+      </p:bgPr>
+    </p:bg>
     <p:spTree>
       <p:nvGrpSpPr>
         <p:cNvPr id="1" name="">
@@ -7933,6 +8253,15 @@
               </a:rPr>
               <a:t>VS BLOCO 18</a:t>
             </a:r>
+            <a:r>
+              <a:rPr lang="pt-BR" sz="4800" baseline="41667" dirty="0">
+                <a:solidFill>
+                  <a:srgbClr val="FFFFFF"/>
+                </a:solidFill>
+                <a:cs typeface="Arial" panose="020B0604020202020204" pitchFamily="34" charset="0"/>
+              </a:rPr>
+              <a:t>  192 / 200 BPM</a:t>
+            </a:r>
           </a:p>
           <a:p>
             <a:pPr marL="36000" indent="-252000" algn="ctr">
@@ -7946,12 +8275,18 @@
             </a:pPr>
             <a:r>
               <a:rPr lang="en-US" sz="7200" dirty="0" err="1">
+                <a:solidFill>
+                  <a:srgbClr val="FFFFFF"/>
+                </a:solidFill>
                 <a:cs typeface="Arial" panose="020B0604020202020204" pitchFamily="34" charset="0"/>
               </a:rPr>
               <a:t>Olhos</a:t>
             </a:r>
             <a:r>
               <a:rPr lang="en-US" sz="7200" dirty="0">
+                <a:solidFill>
+                  <a:srgbClr val="FFFFFF"/>
+                </a:solidFill>
                 <a:cs typeface="Arial" panose="020B0604020202020204" pitchFamily="34" charset="0"/>
               </a:rPr>
               <a:t> Negros </a:t>
@@ -7978,12 +8313,18 @@
             </a:pPr>
             <a:r>
               <a:rPr lang="en-US" sz="7200" dirty="0" err="1">
+                <a:solidFill>
+                  <a:srgbClr val="FFFFFF"/>
+                </a:solidFill>
                 <a:cs typeface="Arial" panose="020B0604020202020204" pitchFamily="34" charset="0"/>
               </a:rPr>
               <a:t>Alô</a:t>
             </a:r>
             <a:r>
               <a:rPr lang="en-US" sz="7200" dirty="0">
+                <a:solidFill>
+                  <a:srgbClr val="FFFFFF"/>
+                </a:solidFill>
                 <a:cs typeface="Arial" panose="020B0604020202020204" pitchFamily="34" charset="0"/>
               </a:rPr>
               <a:t> meu Amor </a:t>
@@ -8036,6 +8377,14 @@
 <file path=ppt/slides/slide2.xml><?xml version="1.0" encoding="utf-8"?>
 <p:sld xmlns:a="http://schemas.openxmlformats.org/drawingml/2006/main" xmlns:r="http://schemas.openxmlformats.org/officeDocument/2006/relationships" xmlns:p="http://schemas.openxmlformats.org/presentationml/2006/main">
   <p:cSld>
+    <p:bg>
+      <p:bgPr>
+        <a:solidFill>
+          <a:srgbClr val="000000"/>
+        </a:solidFill>
+        <a:effectLst/>
+      </p:bgPr>
+    </p:bg>
     <p:spTree>
       <p:nvGrpSpPr>
         <p:cNvPr id="1" name="">
@@ -8099,6 +8448,15 @@
               </a:rPr>
               <a:t>VS BLOCO 1</a:t>
             </a:r>
+            <a:r>
+              <a:rPr lang="pt-BR" sz="4800" baseline="41667" dirty="0">
+                <a:solidFill>
+                  <a:srgbClr val="FFFFFF"/>
+                </a:solidFill>
+                <a:cs typeface="Arial" panose="020B0604020202020204" pitchFamily="34" charset="0"/>
+              </a:rPr>
+              <a:t>  140 BPM</a:t>
+            </a:r>
           </a:p>
           <a:p>
             <a:pPr marL="36000" indent="-252000" algn="ctr">
@@ -8112,12 +8470,18 @@
             </a:pPr>
             <a:r>
               <a:rPr lang="en-US" sz="7200" dirty="0" err="1">
+                <a:solidFill>
+                  <a:srgbClr val="FFFFFF"/>
+                </a:solidFill>
                 <a:cs typeface="Arial" panose="020B0604020202020204" pitchFamily="34" charset="0"/>
               </a:rPr>
               <a:t>Alambique</a:t>
             </a:r>
             <a:r>
               <a:rPr lang="en-US" sz="7200" dirty="0">
+                <a:solidFill>
+                  <a:srgbClr val="FFFFFF"/>
+                </a:solidFill>
                 <a:cs typeface="Arial" panose="020B0604020202020204" pitchFamily="34" charset="0"/>
               </a:rPr>
               <a:t> </a:t>
@@ -8144,18 +8508,27 @@
             </a:pPr>
             <a:r>
               <a:rPr lang="en-US" sz="7200" dirty="0">
+                <a:solidFill>
+                  <a:srgbClr val="FFFFFF"/>
+                </a:solidFill>
                 <a:cs typeface="Arial" panose="020B0604020202020204" pitchFamily="34" charset="0"/>
               </a:rPr>
               <a:t>Pode </a:t>
             </a:r>
             <a:r>
               <a:rPr lang="en-US" sz="7200" dirty="0" err="1">
+                <a:solidFill>
+                  <a:srgbClr val="FFFFFF"/>
+                </a:solidFill>
                 <a:cs typeface="Arial" panose="020B0604020202020204" pitchFamily="34" charset="0"/>
               </a:rPr>
               <a:t>Passar</a:t>
             </a:r>
             <a:r>
               <a:rPr lang="en-US" sz="7200" dirty="0">
+                <a:solidFill>
+                  <a:srgbClr val="FFFFFF"/>
+                </a:solidFill>
                 <a:cs typeface="Arial" panose="020B0604020202020204" pitchFamily="34" charset="0"/>
               </a:rPr>
               <a:t> o Rodo </a:t>
@@ -8182,12 +8555,18 @@
             </a:pPr>
             <a:r>
               <a:rPr lang="en-US" sz="7200" dirty="0" err="1">
+                <a:solidFill>
+                  <a:srgbClr val="FFFFFF"/>
+                </a:solidFill>
                 <a:cs typeface="Arial" panose="020B0604020202020204" pitchFamily="34" charset="0"/>
               </a:rPr>
               <a:t>Sofro</a:t>
             </a:r>
             <a:r>
               <a:rPr lang="en-US" sz="7200" dirty="0">
+                <a:solidFill>
+                  <a:srgbClr val="FFFFFF"/>
+                </a:solidFill>
                 <a:cs typeface="Arial" panose="020B0604020202020204" pitchFamily="34" charset="0"/>
               </a:rPr>
               <a:t> e Choro </a:t>
@@ -8240,6 +8619,14 @@
 <file path=ppt/slides/slide20.xml><?xml version="1.0" encoding="utf-8"?>
 <p:sld xmlns:a="http://schemas.openxmlformats.org/drawingml/2006/main" xmlns:r="http://schemas.openxmlformats.org/officeDocument/2006/relationships" xmlns:p="http://schemas.openxmlformats.org/presentationml/2006/main">
   <p:cSld>
+    <p:bg>
+      <p:bgPr>
+        <a:solidFill>
+          <a:srgbClr val="000000"/>
+        </a:solidFill>
+        <a:effectLst/>
+      </p:bgPr>
+    </p:bg>
     <p:spTree>
       <p:nvGrpSpPr>
         <p:cNvPr id="1" name="">
@@ -8303,6 +8690,15 @@
               </a:rPr>
               <a:t>VS BLOCO 19</a:t>
             </a:r>
+            <a:r>
+              <a:rPr lang="pt-BR" sz="4800" baseline="41667" dirty="0">
+                <a:solidFill>
+                  <a:srgbClr val="FFFFFF"/>
+                </a:solidFill>
+                <a:cs typeface="Arial" panose="020B0604020202020204" pitchFamily="34" charset="0"/>
+              </a:rPr>
+              <a:t>  137 BPM</a:t>
+            </a:r>
           </a:p>
           <a:p>
             <a:pPr marL="36000" indent="-252000" algn="ctr">
@@ -8315,7 +8711,11 @@
               <a:buNone/>
             </a:pPr>
             <a:r>
-              <a:rPr lang="pt-BR" sz="6600" dirty="0"/>
+              <a:rPr lang="pt-BR" sz="6600" dirty="0">
+                <a:solidFill>
+                  <a:srgbClr val="FFFFFF"/>
+                </a:solidFill>
+              </a:rPr>
               <a:t>Pegando Ônibus </a:t>
             </a:r>
             <a:r>
@@ -8330,7 +8730,11 @@
               <a:rPr lang="pt-BR" sz="6600" dirty="0"/>
             </a:br>
             <a:r>
-              <a:rPr lang="pt-BR" sz="6600" dirty="0"/>
+              <a:rPr lang="pt-BR" sz="6600" dirty="0">
+                <a:solidFill>
+                  <a:srgbClr val="FFFFFF"/>
+                </a:solidFill>
+              </a:rPr>
               <a:t>Bandido Do Amor </a:t>
             </a:r>
             <a:r>
@@ -8345,7 +8749,11 @@
               <a:rPr lang="pt-BR" sz="6600" dirty="0"/>
             </a:br>
             <a:r>
-              <a:rPr lang="pt-BR" sz="6600" dirty="0"/>
+              <a:rPr lang="pt-BR" sz="6600" dirty="0">
+                <a:solidFill>
+                  <a:srgbClr val="FFFFFF"/>
+                </a:solidFill>
+              </a:rPr>
               <a:t>O Que Tiver Que Vir Virá </a:t>
             </a:r>
             <a:r>
@@ -8381,6 +8789,14 @@
 <file path=ppt/slides/slide21.xml><?xml version="1.0" encoding="utf-8"?>
 <p:sld xmlns:a="http://schemas.openxmlformats.org/drawingml/2006/main" xmlns:r="http://schemas.openxmlformats.org/officeDocument/2006/relationships" xmlns:p="http://schemas.openxmlformats.org/presentationml/2006/main">
   <p:cSld>
+    <p:bg>
+      <p:bgPr>
+        <a:solidFill>
+          <a:srgbClr val="000000"/>
+        </a:solidFill>
+        <a:effectLst/>
+      </p:bgPr>
+    </p:bg>
     <p:spTree>
       <p:nvGrpSpPr>
         <p:cNvPr id="1" name="">
@@ -8444,6 +8860,15 @@
               </a:rPr>
               <a:t>VS BLOCO 20</a:t>
             </a:r>
+            <a:r>
+              <a:rPr lang="pt-BR" sz="4800" baseline="41667" dirty="0">
+                <a:solidFill>
+                  <a:srgbClr val="FFFFFF"/>
+                </a:solidFill>
+                <a:cs typeface="Arial" panose="020B0604020202020204" pitchFamily="34" charset="0"/>
+              </a:rPr>
+              <a:t>  190 BPM</a:t>
+            </a:r>
           </a:p>
           <a:p>
             <a:pPr marL="36000" indent="-252000" algn="ctr">
@@ -8456,7 +8881,11 @@
               <a:buNone/>
             </a:pPr>
             <a:r>
-              <a:rPr lang="pt-BR" sz="7200" dirty="0"/>
+              <a:rPr lang="pt-BR" sz="7200" dirty="0">
+                <a:solidFill>
+                  <a:srgbClr val="FFFFFF"/>
+                </a:solidFill>
+              </a:rPr>
               <a:t>Perigosa e Linda </a:t>
             </a:r>
             <a:r>
@@ -8471,19 +8900,35 @@
               <a:rPr lang="pt-BR" sz="7200" dirty="0"/>
             </a:br>
             <a:r>
-              <a:rPr lang="pt-BR" sz="7200" dirty="0" err="1"/>
+              <a:rPr lang="pt-BR" sz="7200" dirty="0" err="1">
+                <a:solidFill>
+                  <a:srgbClr val="FFFFFF"/>
+                </a:solidFill>
+              </a:rPr>
               <a:t>Cumpadi</a:t>
             </a:r>
             <a:r>
-              <a:rPr lang="pt-BR" sz="7200" dirty="0"/>
+              <a:rPr lang="pt-BR" sz="7200" dirty="0">
+                <a:solidFill>
+                  <a:srgbClr val="FFFFFF"/>
+                </a:solidFill>
+              </a:rPr>
               <a:t> e </a:t>
             </a:r>
             <a:r>
-              <a:rPr lang="pt-BR" sz="7200" dirty="0" err="1"/>
+              <a:rPr lang="pt-BR" sz="7200" dirty="0" err="1">
+                <a:solidFill>
+                  <a:srgbClr val="FFFFFF"/>
+                </a:solidFill>
+              </a:rPr>
               <a:t>Cumadi</a:t>
             </a:r>
             <a:r>
-              <a:rPr lang="pt-BR" sz="7200" dirty="0"/>
+              <a:rPr lang="pt-BR" sz="7200" dirty="0">
+                <a:solidFill>
+                  <a:srgbClr val="FFFFFF"/>
+                </a:solidFill>
+              </a:rPr>
               <a:t> </a:t>
             </a:r>
             <a:r>
@@ -8519,6 +8964,14 @@
 <file path=ppt/slides/slide22.xml><?xml version="1.0" encoding="utf-8"?>
 <p:sld xmlns:a="http://schemas.openxmlformats.org/drawingml/2006/main" xmlns:r="http://schemas.openxmlformats.org/officeDocument/2006/relationships" xmlns:p="http://schemas.openxmlformats.org/presentationml/2006/main">
   <p:cSld>
+    <p:bg>
+      <p:bgPr>
+        <a:solidFill>
+          <a:srgbClr val="000000"/>
+        </a:solidFill>
+        <a:effectLst/>
+      </p:bgPr>
+    </p:bg>
     <p:spTree>
       <p:nvGrpSpPr>
         <p:cNvPr id="1" name="">
@@ -8582,6 +9035,15 @@
               </a:rPr>
               <a:t>VS BLOCO 21</a:t>
             </a:r>
+            <a:r>
+              <a:rPr lang="pt-BR" sz="4800" baseline="41667" dirty="0">
+                <a:solidFill>
+                  <a:srgbClr val="FFFFFF"/>
+                </a:solidFill>
+                <a:cs typeface="Arial" panose="020B0604020202020204" pitchFamily="34" charset="0"/>
+              </a:rPr>
+              <a:t>  140 BPM</a:t>
+            </a:r>
           </a:p>
           <a:p>
             <a:pPr marL="36000" indent="-252000" algn="ctr">
@@ -8594,7 +9056,11 @@
               <a:buNone/>
             </a:pPr>
             <a:r>
-              <a:rPr lang="pt-BR" sz="7200" dirty="0"/>
+              <a:rPr lang="pt-BR" sz="7200" dirty="0">
+                <a:solidFill>
+                  <a:srgbClr val="FFFFFF"/>
+                </a:solidFill>
+              </a:rPr>
               <a:t>Reprises De Amor </a:t>
             </a:r>
             <a:r>
@@ -8609,7 +9075,11 @@
               <a:rPr lang="pt-BR" sz="7200" dirty="0"/>
             </a:br>
             <a:r>
-              <a:rPr lang="pt-BR" sz="7200" dirty="0"/>
+              <a:rPr lang="pt-BR" sz="7200" dirty="0">
+                <a:solidFill>
+                  <a:srgbClr val="FFFFFF"/>
+                </a:solidFill>
+              </a:rPr>
               <a:t>Eu O Copo e a Solidão </a:t>
             </a:r>
             <a:r>
@@ -8624,7 +9094,11 @@
               <a:rPr lang="pt-BR" sz="7200" dirty="0"/>
             </a:br>
             <a:r>
-              <a:rPr lang="pt-BR" sz="7200" dirty="0"/>
+              <a:rPr lang="pt-BR" sz="7200" dirty="0">
+                <a:solidFill>
+                  <a:srgbClr val="FFFFFF"/>
+                </a:solidFill>
+              </a:rPr>
               <a:t>Você Me Tira Do Ar </a:t>
             </a:r>
             <a:r>
@@ -8660,6 +9134,14 @@
 <file path=ppt/slides/slide23.xml><?xml version="1.0" encoding="utf-8"?>
 <p:sld xmlns:a="http://schemas.openxmlformats.org/drawingml/2006/main" xmlns:r="http://schemas.openxmlformats.org/officeDocument/2006/relationships" xmlns:p="http://schemas.openxmlformats.org/presentationml/2006/main">
   <p:cSld>
+    <p:bg>
+      <p:bgPr>
+        <a:solidFill>
+          <a:srgbClr val="000000"/>
+        </a:solidFill>
+        <a:effectLst/>
+      </p:bgPr>
+    </p:bg>
     <p:spTree>
       <p:nvGrpSpPr>
         <p:cNvPr id="1" name="">
@@ -8723,6 +9205,15 @@
               </a:rPr>
               <a:t>VS BLOCO 22</a:t>
             </a:r>
+            <a:r>
+              <a:rPr lang="pt-BR" sz="4800" baseline="41667" dirty="0">
+                <a:solidFill>
+                  <a:srgbClr val="FFFFFF"/>
+                </a:solidFill>
+                <a:cs typeface="Arial" panose="020B0604020202020204" pitchFamily="34" charset="0"/>
+              </a:rPr>
+              <a:t>  140 BPM</a:t>
+            </a:r>
           </a:p>
           <a:p>
             <a:pPr marL="36000" indent="-252000" algn="ctr">
@@ -8735,7 +9226,11 @@
               <a:buNone/>
             </a:pPr>
             <a:r>
-              <a:rPr lang="pt-BR" sz="7200" dirty="0"/>
+              <a:rPr lang="pt-BR" sz="7200" dirty="0">
+                <a:solidFill>
+                  <a:srgbClr val="FFFFFF"/>
+                </a:solidFill>
+              </a:rPr>
               <a:t>Santa Catarina </a:t>
             </a:r>
             <a:r>
@@ -8750,7 +9245,11 @@
               <a:rPr lang="pt-BR" sz="7200" dirty="0"/>
             </a:br>
             <a:r>
-              <a:rPr lang="pt-BR" sz="7200" dirty="0"/>
+              <a:rPr lang="pt-BR" sz="7200" dirty="0">
+                <a:solidFill>
+                  <a:srgbClr val="FFFFFF"/>
+                </a:solidFill>
+              </a:rPr>
               <a:t>Baile Bom </a:t>
             </a:r>
             <a:r>
@@ -8765,7 +9264,11 @@
               <a:rPr lang="pt-BR" sz="7200" dirty="0"/>
             </a:br>
             <a:r>
-              <a:rPr lang="pt-BR" sz="7200" dirty="0"/>
+              <a:rPr lang="pt-BR" sz="7200" dirty="0">
+                <a:solidFill>
+                  <a:srgbClr val="FFFFFF"/>
+                </a:solidFill>
+              </a:rPr>
               <a:t>Diga Locutor </a:t>
             </a:r>
             <a:r>
@@ -8801,6 +9304,14 @@
 <file path=ppt/slides/slide24.xml><?xml version="1.0" encoding="utf-8"?>
 <p:sld xmlns:a="http://schemas.openxmlformats.org/drawingml/2006/main" xmlns:r="http://schemas.openxmlformats.org/officeDocument/2006/relationships" xmlns:p="http://schemas.openxmlformats.org/presentationml/2006/main">
   <p:cSld>
+    <p:bg>
+      <p:bgPr>
+        <a:solidFill>
+          <a:srgbClr val="000000"/>
+        </a:solidFill>
+        <a:effectLst/>
+      </p:bgPr>
+    </p:bg>
     <p:spTree>
       <p:nvGrpSpPr>
         <p:cNvPr id="1" name="">
@@ -8864,6 +9375,15 @@
               </a:rPr>
               <a:t>VS BLOCO 23</a:t>
             </a:r>
+            <a:r>
+              <a:rPr lang="pt-BR" sz="4800" baseline="41667" dirty="0">
+                <a:solidFill>
+                  <a:srgbClr val="FFFFFF"/>
+                </a:solidFill>
+                <a:cs typeface="Arial" panose="020B0604020202020204" pitchFamily="34" charset="0"/>
+              </a:rPr>
+              <a:t>  188 BPM</a:t>
+            </a:r>
           </a:p>
           <a:p>
             <a:pPr marL="36000" indent="-252000" algn="ctr">
@@ -8876,7 +9396,11 @@
               <a:buNone/>
             </a:pPr>
             <a:r>
-              <a:rPr lang="pt-BR" sz="7200" dirty="0"/>
+              <a:rPr lang="pt-BR" sz="7200" dirty="0">
+                <a:solidFill>
+                  <a:srgbClr val="FFFFFF"/>
+                </a:solidFill>
+              </a:rPr>
               <a:t>Vagabundo </a:t>
             </a:r>
             <a:r>
@@ -8891,15 +9415,27 @@
               <a:rPr lang="pt-BR" sz="7200" dirty="0"/>
             </a:br>
             <a:r>
-              <a:rPr lang="pt-BR" sz="7200" dirty="0"/>
+              <a:rPr lang="pt-BR" sz="7200" dirty="0">
+                <a:solidFill>
+                  <a:srgbClr val="FFFFFF"/>
+                </a:solidFill>
+              </a:rPr>
               <a:t>Agarra </a:t>
             </a:r>
             <a:r>
-              <a:rPr lang="pt-BR" sz="7200" dirty="0" err="1"/>
+              <a:rPr lang="pt-BR" sz="7200" dirty="0" err="1">
+                <a:solidFill>
+                  <a:srgbClr val="FFFFFF"/>
+                </a:solidFill>
+              </a:rPr>
               <a:t>Agara</a:t>
             </a:r>
             <a:r>
-              <a:rPr lang="pt-BR" sz="7200" dirty="0"/>
+              <a:rPr lang="pt-BR" sz="7200" dirty="0">
+                <a:solidFill>
+                  <a:srgbClr val="FFFFFF"/>
+                </a:solidFill>
+              </a:rPr>
               <a:t> </a:t>
             </a:r>
             <a:r>
@@ -8914,7 +9450,11 @@
               <a:rPr lang="pt-BR" sz="7200" dirty="0"/>
             </a:br>
             <a:r>
-              <a:rPr lang="pt-BR" sz="7200" dirty="0"/>
+              <a:rPr lang="pt-BR" sz="7200" dirty="0">
+                <a:solidFill>
+                  <a:srgbClr val="FFFFFF"/>
+                </a:solidFill>
+              </a:rPr>
               <a:t>Vira e Mexe </a:t>
             </a:r>
             <a:r>
@@ -8950,6 +9490,14 @@
 <file path=ppt/slides/slide25.xml><?xml version="1.0" encoding="utf-8"?>
 <p:sld xmlns:a="http://schemas.openxmlformats.org/drawingml/2006/main" xmlns:r="http://schemas.openxmlformats.org/officeDocument/2006/relationships" xmlns:p="http://schemas.openxmlformats.org/presentationml/2006/main">
   <p:cSld>
+    <p:bg>
+      <p:bgPr>
+        <a:solidFill>
+          <a:srgbClr val="000000"/>
+        </a:solidFill>
+        <a:effectLst/>
+      </p:bgPr>
+    </p:bg>
     <p:spTree>
       <p:nvGrpSpPr>
         <p:cNvPr id="1" name=""/>
@@ -9007,6 +9555,15 @@
               </a:rPr>
               <a:t>VS BLOCO 24</a:t>
             </a:r>
+            <a:r>
+              <a:rPr lang="pt-BR" sz="4800" baseline="41667" dirty="0">
+                <a:solidFill>
+                  <a:srgbClr val="FFFFFF"/>
+                </a:solidFill>
+                <a:cs typeface="Arial" panose="020B0604020202020204" pitchFamily="34" charset="0"/>
+              </a:rPr>
+              <a:t>  138 BPM</a:t>
+            </a:r>
           </a:p>
           <a:p>
             <a:pPr marL="36000" indent="-252000" algn="ctr">
@@ -9019,7 +9576,11 @@
               <a:buNone/>
             </a:pPr>
             <a:r>
-              <a:rPr lang="pt-BR" sz="7200" dirty="0"/>
+              <a:rPr lang="pt-BR" sz="7200" dirty="0">
+                <a:solidFill>
+                  <a:srgbClr val="FFFFFF"/>
+                </a:solidFill>
+              </a:rPr>
               <a:t>Alô Galera </a:t>
             </a:r>
             <a:r>
@@ -9034,7 +9595,11 @@
               <a:rPr lang="pt-BR" sz="7200" dirty="0"/>
             </a:br>
             <a:r>
-              <a:rPr lang="pt-BR" sz="7200" dirty="0"/>
+              <a:rPr lang="pt-BR" sz="7200" dirty="0">
+                <a:solidFill>
+                  <a:srgbClr val="FFFFFF"/>
+                </a:solidFill>
+              </a:rPr>
               <a:t>Essa Cama Eu Não Vendo </a:t>
             </a:r>
             <a:r>
@@ -9049,7 +9614,11 @@
               <a:rPr lang="pt-BR" sz="7200" dirty="0"/>
             </a:br>
             <a:r>
-              <a:rPr lang="pt-BR" sz="7200" dirty="0"/>
+              <a:rPr lang="pt-BR" sz="7200" dirty="0">
+                <a:solidFill>
+                  <a:srgbClr val="FFFFFF"/>
+                </a:solidFill>
+              </a:rPr>
               <a:t>Pintou Uma Paixão </a:t>
             </a:r>
             <a:r>
@@ -9064,7 +9633,11 @@
               <a:rPr lang="pt-BR" sz="7200" dirty="0"/>
             </a:br>
             <a:r>
-              <a:rPr lang="pt-BR" sz="7200" dirty="0"/>
+              <a:rPr lang="pt-BR" sz="7200" dirty="0">
+                <a:solidFill>
+                  <a:srgbClr val="FFFFFF"/>
+                </a:solidFill>
+              </a:rPr>
               <a:t>Transgênica </a:t>
             </a:r>
             <a:r>
@@ -9079,7 +9652,11 @@
               <a:rPr lang="pt-BR" sz="7200" dirty="0"/>
             </a:br>
             <a:r>
-              <a:rPr lang="pt-BR" sz="7200" dirty="0"/>
+              <a:rPr lang="pt-BR" sz="7200" dirty="0">
+                <a:solidFill>
+                  <a:srgbClr val="FFFFFF"/>
+                </a:solidFill>
+              </a:rPr>
               <a:t>Algo Me Diz </a:t>
             </a:r>
             <a:r>
@@ -9104,6 +9681,14 @@
 <file path=ppt/slides/slide26.xml><?xml version="1.0" encoding="utf-8"?>
 <p:sld xmlns:a="http://schemas.openxmlformats.org/drawingml/2006/main" xmlns:r="http://schemas.openxmlformats.org/officeDocument/2006/relationships" xmlns:p="http://schemas.openxmlformats.org/presentationml/2006/main">
   <p:cSld>
+    <p:bg>
+      <p:bgPr>
+        <a:solidFill>
+          <a:srgbClr val="000000"/>
+        </a:solidFill>
+        <a:effectLst/>
+      </p:bgPr>
+    </p:bg>
     <p:spTree>
       <p:nvGrpSpPr>
         <p:cNvPr id="1" name=""/>
@@ -9161,6 +9746,15 @@
               </a:rPr>
               <a:t>VS BLOCO 25</a:t>
             </a:r>
+            <a:r>
+              <a:rPr lang="pt-BR" sz="4800" baseline="41667" dirty="0">
+                <a:solidFill>
+                  <a:srgbClr val="FFFFFF"/>
+                </a:solidFill>
+                <a:cs typeface="Arial" panose="020B0604020202020204" pitchFamily="34" charset="0"/>
+              </a:rPr>
+              <a:t>  136 BPM</a:t>
+            </a:r>
           </a:p>
           <a:p>
             <a:pPr marL="36000" indent="-252000" algn="ctr">
@@ -9173,7 +9767,11 @@
               <a:buNone/>
             </a:pPr>
             <a:r>
-              <a:rPr lang="pt-BR" sz="7200" dirty="0"/>
+              <a:rPr lang="pt-BR" sz="7200" dirty="0">
+                <a:solidFill>
+                  <a:srgbClr val="FFFFFF"/>
+                </a:solidFill>
+              </a:rPr>
               <a:t>Barril de Chopp </a:t>
             </a:r>
             <a:r>
@@ -9188,7 +9786,11 @@
               <a:rPr lang="pt-BR" sz="7200" dirty="0"/>
             </a:br>
             <a:r>
-              <a:rPr lang="pt-BR" sz="7200" dirty="0"/>
+              <a:rPr lang="pt-BR" sz="7200" dirty="0">
+                <a:solidFill>
+                  <a:srgbClr val="FFFFFF"/>
+                </a:solidFill>
+              </a:rPr>
               <a:t>Ouro na Estrada </a:t>
             </a:r>
             <a:r>
@@ -9203,7 +9805,11 @@
               <a:rPr lang="pt-BR" sz="7200" dirty="0"/>
             </a:br>
             <a:r>
-              <a:rPr lang="pt-BR" sz="7200" dirty="0"/>
+              <a:rPr lang="pt-BR" sz="7200" dirty="0">
+                <a:solidFill>
+                  <a:srgbClr val="FFFFFF"/>
+                </a:solidFill>
+              </a:rPr>
               <a:t>Bebidas de Amor </a:t>
             </a:r>
             <a:r>
@@ -9228,6 +9834,14 @@
 <file path=ppt/slides/slide27.xml><?xml version="1.0" encoding="utf-8"?>
 <p:sld xmlns:a="http://schemas.openxmlformats.org/drawingml/2006/main" xmlns:r="http://schemas.openxmlformats.org/officeDocument/2006/relationships" xmlns:p="http://schemas.openxmlformats.org/presentationml/2006/main">
   <p:cSld>
+    <p:bg>
+      <p:bgPr>
+        <a:solidFill>
+          <a:srgbClr val="000000"/>
+        </a:solidFill>
+        <a:effectLst/>
+      </p:bgPr>
+    </p:bg>
     <p:spTree>
       <p:nvGrpSpPr>
         <p:cNvPr id="1" name=""/>
@@ -9285,6 +9899,15 @@
               </a:rPr>
               <a:t>VS BLOCO 26</a:t>
             </a:r>
+            <a:r>
+              <a:rPr lang="pt-BR" sz="4800" baseline="41667" dirty="0">
+                <a:solidFill>
+                  <a:srgbClr val="FFFFFF"/>
+                </a:solidFill>
+                <a:cs typeface="Arial" panose="020B0604020202020204" pitchFamily="34" charset="0"/>
+              </a:rPr>
+              <a:t>  138 BPM</a:t>
+            </a:r>
           </a:p>
           <a:p>
             <a:pPr marL="36000" indent="-252000" algn="ctr">
@@ -9297,7 +9920,11 @@
               <a:buNone/>
             </a:pPr>
             <a:r>
-              <a:rPr lang="pt-BR" sz="7200" dirty="0"/>
+              <a:rPr lang="pt-BR" sz="7200" dirty="0">
+                <a:solidFill>
+                  <a:srgbClr val="FFFFFF"/>
+                </a:solidFill>
+              </a:rPr>
               <a:t>Beija Beija </a:t>
             </a:r>
             <a:r>
@@ -9312,7 +9939,11 @@
               <a:rPr lang="pt-BR" sz="7200" dirty="0"/>
             </a:br>
             <a:r>
-              <a:rPr lang="pt-BR" sz="7200" dirty="0"/>
+              <a:rPr lang="pt-BR" sz="7200" dirty="0">
+                <a:solidFill>
+                  <a:srgbClr val="FFFFFF"/>
+                </a:solidFill>
+              </a:rPr>
               <a:t>Marreca </a:t>
             </a:r>
             <a:r>
@@ -9327,7 +9958,11 @@
               <a:rPr lang="pt-BR" sz="7200" dirty="0"/>
             </a:br>
             <a:r>
-              <a:rPr lang="pt-BR" sz="7200" dirty="0"/>
+              <a:rPr lang="pt-BR" sz="7200" dirty="0">
+                <a:solidFill>
+                  <a:srgbClr val="FFFFFF"/>
+                </a:solidFill>
+              </a:rPr>
               <a:t>Kerbfest </a:t>
             </a:r>
             <a:r>
@@ -9352,6 +9987,14 @@
 <file path=ppt/slides/slide28.xml><?xml version="1.0" encoding="utf-8"?>
 <p:sld xmlns:a="http://schemas.openxmlformats.org/drawingml/2006/main" xmlns:r="http://schemas.openxmlformats.org/officeDocument/2006/relationships" xmlns:p="http://schemas.openxmlformats.org/presentationml/2006/main">
   <p:cSld>
+    <p:bg>
+      <p:bgPr>
+        <a:solidFill>
+          <a:srgbClr val="000000"/>
+        </a:solidFill>
+        <a:effectLst/>
+      </p:bgPr>
+    </p:bg>
     <p:spTree>
       <p:nvGrpSpPr>
         <p:cNvPr id="1" name=""/>
@@ -9409,6 +10052,15 @@
               </a:rPr>
               <a:t>VS BLOCO 27</a:t>
             </a:r>
+            <a:r>
+              <a:rPr lang="pt-BR" sz="4800" baseline="41667" dirty="0">
+                <a:solidFill>
+                  <a:srgbClr val="FFFFFF"/>
+                </a:solidFill>
+                <a:cs typeface="Arial" panose="020B0604020202020204" pitchFamily="34" charset="0"/>
+              </a:rPr>
+              <a:t>  168 BPM</a:t>
+            </a:r>
           </a:p>
           <a:p>
             <a:pPr marL="36000" indent="-252000" algn="ctr">
@@ -9421,7 +10073,11 @@
               <a:buNone/>
             </a:pPr>
             <a:r>
-              <a:rPr lang="pt-BR" sz="7200" dirty="0"/>
+              <a:rPr lang="pt-BR" sz="7200" dirty="0">
+                <a:solidFill>
+                  <a:srgbClr val="FFFFFF"/>
+                </a:solidFill>
+              </a:rPr>
               <a:t>Camisa Manchada </a:t>
             </a:r>
             <a:r>
@@ -9436,7 +10092,11 @@
               <a:rPr lang="pt-BR" sz="7200" dirty="0"/>
             </a:br>
             <a:r>
-              <a:rPr lang="pt-BR" sz="7200" dirty="0"/>
+              <a:rPr lang="pt-BR" sz="7200" dirty="0">
+                <a:solidFill>
+                  <a:srgbClr val="FFFFFF"/>
+                </a:solidFill>
+              </a:rPr>
               <a:t>&lt;falta o nome&gt; </a:t>
             </a:r>
             <a:r>
@@ -9451,7 +10111,11 @@
               <a:rPr lang="pt-BR" sz="7200" dirty="0"/>
             </a:br>
             <a:r>
-              <a:rPr lang="pt-BR" sz="7200" dirty="0"/>
+              <a:rPr lang="pt-BR" sz="7200" dirty="0">
+                <a:solidFill>
+                  <a:srgbClr val="FFFFFF"/>
+                </a:solidFill>
+              </a:rPr>
               <a:t>Estrada Da Vida </a:t>
             </a:r>
             <a:r>
@@ -9476,6 +10140,14 @@
 <file path=ppt/slides/slide29.xml><?xml version="1.0" encoding="utf-8"?>
 <p:sld xmlns:a="http://schemas.openxmlformats.org/drawingml/2006/main" xmlns:r="http://schemas.openxmlformats.org/officeDocument/2006/relationships" xmlns:p="http://schemas.openxmlformats.org/presentationml/2006/main">
   <p:cSld>
+    <p:bg>
+      <p:bgPr>
+        <a:solidFill>
+          <a:srgbClr val="000000"/>
+        </a:solidFill>
+        <a:effectLst/>
+      </p:bgPr>
+    </p:bg>
     <p:spTree>
       <p:nvGrpSpPr>
         <p:cNvPr id="1" name=""/>
@@ -9533,6 +10205,15 @@
               </a:rPr>
               <a:t>VS BLOCO 28</a:t>
             </a:r>
+            <a:r>
+              <a:rPr lang="pt-BR" sz="4800" baseline="41667" dirty="0">
+                <a:solidFill>
+                  <a:srgbClr val="FFFFFF"/>
+                </a:solidFill>
+                <a:cs typeface="Arial" panose="020B0604020202020204" pitchFamily="34" charset="0"/>
+              </a:rPr>
+              <a:t>  130 BPM</a:t>
+            </a:r>
           </a:p>
           <a:p>
             <a:pPr marL="36000" indent="-252000" algn="ctr">
@@ -9545,7 +10226,11 @@
               <a:buNone/>
             </a:pPr>
             <a:r>
-              <a:rPr lang="pt-BR" sz="5400" dirty="0"/>
+              <a:rPr lang="pt-BR" sz="5400" dirty="0">
+                <a:solidFill>
+                  <a:srgbClr val="FFFFFF"/>
+                </a:solidFill>
+              </a:rPr>
               <a:t>Coronel Boogey </a:t>
             </a:r>
             <a:r>
@@ -9560,7 +10245,11 @@
               <a:rPr lang="pt-BR" sz="5400" dirty="0"/>
             </a:br>
             <a:r>
-              <a:rPr lang="pt-BR" sz="5400" dirty="0"/>
+              <a:rPr lang="pt-BR" sz="5400" dirty="0">
+                <a:solidFill>
+                  <a:srgbClr val="FFFFFF"/>
+                </a:solidFill>
+              </a:rPr>
               <a:t>Marcha do Coelho </a:t>
             </a:r>
             <a:r>
@@ -9585,6 +10274,14 @@
 <file path=ppt/slides/slide3.xml><?xml version="1.0" encoding="utf-8"?>
 <p:sld xmlns:a="http://schemas.openxmlformats.org/drawingml/2006/main" xmlns:r="http://schemas.openxmlformats.org/officeDocument/2006/relationships" xmlns:p="http://schemas.openxmlformats.org/presentationml/2006/main">
   <p:cSld>
+    <p:bg>
+      <p:bgPr>
+        <a:solidFill>
+          <a:srgbClr val="000000"/>
+        </a:solidFill>
+        <a:effectLst/>
+      </p:bgPr>
+    </p:bg>
     <p:spTree>
       <p:nvGrpSpPr>
         <p:cNvPr id="1" name="">
@@ -9648,6 +10345,15 @@
               </a:rPr>
               <a:t>VS BLOCO 2</a:t>
             </a:r>
+            <a:r>
+              <a:rPr lang="pt-BR" sz="4800" baseline="41667" dirty="0">
+                <a:solidFill>
+                  <a:srgbClr val="FFFFFF"/>
+                </a:solidFill>
+                <a:cs typeface="Arial" panose="020B0604020202020204" pitchFamily="34" charset="0"/>
+              </a:rPr>
+              <a:t>  137 BPM</a:t>
+            </a:r>
           </a:p>
           <a:p>
             <a:pPr marL="36000" indent="-252000" algn="ctr">
@@ -9660,15 +10366,27 @@
               <a:buNone/>
             </a:pPr>
             <a:r>
-              <a:rPr lang="pt-BR" sz="7200" dirty="0"/>
+              <a:rPr lang="pt-BR" sz="7200" dirty="0">
+                <a:solidFill>
+                  <a:srgbClr val="FFFFFF"/>
+                </a:solidFill>
+              </a:rPr>
               <a:t>Amor </a:t>
             </a:r>
             <a:r>
-              <a:rPr lang="pt-BR" sz="7200" dirty="0" err="1"/>
+              <a:rPr lang="pt-BR" sz="7200" dirty="0" err="1">
+                <a:solidFill>
+                  <a:srgbClr val="FFFFFF"/>
+                </a:solidFill>
+              </a:rPr>
               <a:t>Carrapixo</a:t>
             </a:r>
             <a:r>
-              <a:rPr lang="pt-BR" sz="7200" dirty="0"/>
+              <a:rPr lang="pt-BR" sz="7200" dirty="0">
+                <a:solidFill>
+                  <a:srgbClr val="FFFFFF"/>
+                </a:solidFill>
+              </a:rPr>
               <a:t> </a:t>
             </a:r>
             <a:r>
@@ -9683,7 +10401,11 @@
               <a:rPr lang="pt-BR" sz="7200" dirty="0"/>
             </a:br>
             <a:r>
-              <a:rPr lang="pt-BR" sz="7200" dirty="0"/>
+              <a:rPr lang="pt-BR" sz="7200" dirty="0">
+                <a:solidFill>
+                  <a:srgbClr val="FFFFFF"/>
+                </a:solidFill>
+              </a:rPr>
               <a:t>Casa Cair </a:t>
             </a:r>
             <a:r>
@@ -9698,7 +10420,11 @@
               <a:rPr lang="pt-BR" sz="7200" dirty="0"/>
             </a:br>
             <a:r>
-              <a:rPr lang="pt-BR" sz="7200" dirty="0"/>
+              <a:rPr lang="pt-BR" sz="7200" dirty="0">
+                <a:solidFill>
+                  <a:srgbClr val="FFFFFF"/>
+                </a:solidFill>
+              </a:rPr>
               <a:t>Sola Da Bota </a:t>
             </a:r>
             <a:r>
@@ -9713,7 +10439,11 @@
               <a:rPr lang="pt-BR" sz="7200" dirty="0"/>
             </a:br>
             <a:r>
-              <a:rPr lang="pt-BR" sz="7200" dirty="0"/>
+              <a:rPr lang="pt-BR" sz="7200" dirty="0">
+                <a:solidFill>
+                  <a:srgbClr val="FFFFFF"/>
+                </a:solidFill>
+              </a:rPr>
               <a:t>Garagem Da Vizinha </a:t>
             </a:r>
             <a:r>
@@ -9749,6 +10479,14 @@
 <file path=ppt/slides/slide30.xml><?xml version="1.0" encoding="utf-8"?>
 <p:sld xmlns:a="http://schemas.openxmlformats.org/drawingml/2006/main" xmlns:r="http://schemas.openxmlformats.org/officeDocument/2006/relationships" xmlns:p="http://schemas.openxmlformats.org/presentationml/2006/main">
   <p:cSld>
+    <p:bg>
+      <p:bgPr>
+        <a:solidFill>
+          <a:srgbClr val="000000"/>
+        </a:solidFill>
+        <a:effectLst/>
+      </p:bgPr>
+    </p:bg>
     <p:spTree>
       <p:nvGrpSpPr>
         <p:cNvPr id="1" name=""/>
@@ -9806,6 +10544,15 @@
               </a:rPr>
               <a:t>VS BLOCO 29</a:t>
             </a:r>
+            <a:r>
+              <a:rPr lang="pt-BR" sz="4800" baseline="41667" dirty="0">
+                <a:solidFill>
+                  <a:srgbClr val="FFFFFF"/>
+                </a:solidFill>
+                <a:cs typeface="Arial" panose="020B0604020202020204" pitchFamily="34" charset="0"/>
+              </a:rPr>
+              <a:t>  138 BPM</a:t>
+            </a:r>
           </a:p>
           <a:p>
             <a:pPr marL="36000" indent="-252000" algn="ctr">
@@ -9818,7 +10565,11 @@
               <a:buNone/>
             </a:pPr>
             <a:r>
-              <a:rPr lang="pt-BR" sz="7200" dirty="0"/>
+              <a:rPr lang="pt-BR" sz="7200" dirty="0">
+                <a:solidFill>
+                  <a:srgbClr val="FFFFFF"/>
+                </a:solidFill>
+              </a:rPr>
               <a:t>Dai Que Mioro </a:t>
             </a:r>
             <a:r>
@@ -9833,7 +10584,11 @@
               <a:rPr lang="pt-BR" sz="7200" dirty="0"/>
             </a:br>
             <a:r>
-              <a:rPr lang="pt-BR" sz="7200" dirty="0"/>
+              <a:rPr lang="pt-BR" sz="7200" dirty="0">
+                <a:solidFill>
+                  <a:srgbClr val="FFFFFF"/>
+                </a:solidFill>
+              </a:rPr>
               <a:t>Senta no Colinho do Pai </a:t>
             </a:r>
             <a:r>
@@ -9848,7 +10603,11 @@
               <a:rPr lang="pt-BR" sz="7200" dirty="0"/>
             </a:br>
             <a:r>
-              <a:rPr lang="pt-BR" sz="7200" dirty="0"/>
+              <a:rPr lang="pt-BR" sz="7200" dirty="0">
+                <a:solidFill>
+                  <a:srgbClr val="FFFFFF"/>
+                </a:solidFill>
+              </a:rPr>
               <a:t>Latinha na Goteira </a:t>
             </a:r>
             <a:r>
@@ -9863,7 +10622,11 @@
               <a:rPr lang="pt-BR" sz="7200" dirty="0"/>
             </a:br>
             <a:r>
-              <a:rPr lang="pt-BR" sz="7200" dirty="0"/>
+              <a:rPr lang="pt-BR" sz="7200" dirty="0">
+                <a:solidFill>
+                  <a:srgbClr val="FFFFFF"/>
+                </a:solidFill>
+              </a:rPr>
               <a:t>Morenaça </a:t>
             </a:r>
             <a:r>
@@ -9878,7 +10641,11 @@
               <a:rPr lang="pt-BR" sz="7200" dirty="0"/>
             </a:br>
             <a:r>
-              <a:rPr lang="pt-BR" sz="7200" dirty="0"/>
+              <a:rPr lang="pt-BR" sz="7200" dirty="0">
+                <a:solidFill>
+                  <a:srgbClr val="FFFFFF"/>
+                </a:solidFill>
+              </a:rPr>
               <a:t>Misturinha </a:t>
             </a:r>
             <a:r>
@@ -9903,6 +10670,14 @@
 <file path=ppt/slides/slide31.xml><?xml version="1.0" encoding="utf-8"?>
 <p:sld xmlns:a="http://schemas.openxmlformats.org/drawingml/2006/main" xmlns:r="http://schemas.openxmlformats.org/officeDocument/2006/relationships" xmlns:p="http://schemas.openxmlformats.org/presentationml/2006/main">
   <p:cSld>
+    <p:bg>
+      <p:bgPr>
+        <a:solidFill>
+          <a:srgbClr val="000000"/>
+        </a:solidFill>
+        <a:effectLst/>
+      </p:bgPr>
+    </p:bg>
     <p:spTree>
       <p:nvGrpSpPr>
         <p:cNvPr id="1" name=""/>
@@ -9960,6 +10735,15 @@
               </a:rPr>
               <a:t>VS BLOCO 30</a:t>
             </a:r>
+            <a:r>
+              <a:rPr lang="pt-BR" sz="4800" baseline="41667" dirty="0">
+                <a:solidFill>
+                  <a:srgbClr val="FFFFFF"/>
+                </a:solidFill>
+                <a:cs typeface="Arial" panose="020B0604020202020204" pitchFamily="34" charset="0"/>
+              </a:rPr>
+              <a:t>  135 BPM</a:t>
+            </a:r>
           </a:p>
           <a:p>
             <a:pPr marL="36000" indent="-252000" algn="ctr">
@@ -9972,7 +10756,11 @@
               <a:buNone/>
             </a:pPr>
             <a:r>
-              <a:rPr lang="pt-BR" sz="7200" dirty="0"/>
+              <a:rPr lang="pt-BR" sz="7200" dirty="0">
+                <a:solidFill>
+                  <a:srgbClr val="FFFFFF"/>
+                </a:solidFill>
+              </a:rPr>
               <a:t>Heyo Heyo </a:t>
             </a:r>
             <a:r>
@@ -9987,7 +10775,11 @@
               <a:rPr lang="pt-BR" sz="7200" dirty="0"/>
             </a:br>
             <a:r>
-              <a:rPr lang="pt-BR" sz="7200" dirty="0"/>
+              <a:rPr lang="pt-BR" sz="7200" dirty="0">
+                <a:solidFill>
+                  <a:srgbClr val="FFFFFF"/>
+                </a:solidFill>
+              </a:rPr>
               <a:t>Zic Zac </a:t>
             </a:r>
             <a:r>
@@ -10002,7 +10794,11 @@
               <a:rPr lang="pt-BR" sz="7200" dirty="0"/>
             </a:br>
             <a:r>
-              <a:rPr lang="pt-BR" sz="7200" dirty="0"/>
+              <a:rPr lang="pt-BR" sz="7200" dirty="0">
+                <a:solidFill>
+                  <a:srgbClr val="FFFFFF"/>
+                </a:solidFill>
+              </a:rPr>
               <a:t>Salada de Frutas </a:t>
             </a:r>
             <a:r>
@@ -10027,6 +10823,14 @@
 <file path=ppt/slides/slide32.xml><?xml version="1.0" encoding="utf-8"?>
 <p:sld xmlns:a="http://schemas.openxmlformats.org/drawingml/2006/main" xmlns:r="http://schemas.openxmlformats.org/officeDocument/2006/relationships" xmlns:p="http://schemas.openxmlformats.org/presentationml/2006/main">
   <p:cSld>
+    <p:bg>
+      <p:bgPr>
+        <a:solidFill>
+          <a:srgbClr val="000000"/>
+        </a:solidFill>
+        <a:effectLst/>
+      </p:bgPr>
+    </p:bg>
     <p:spTree>
       <p:nvGrpSpPr>
         <p:cNvPr id="1" name=""/>
@@ -10084,6 +10888,15 @@
               </a:rPr>
               <a:t>VS BLOCO 31</a:t>
             </a:r>
+            <a:r>
+              <a:rPr lang="pt-BR" sz="4800" baseline="41667" dirty="0">
+                <a:solidFill>
+                  <a:srgbClr val="FFFFFF"/>
+                </a:solidFill>
+                <a:cs typeface="Arial" panose="020B0604020202020204" pitchFamily="34" charset="0"/>
+              </a:rPr>
+              <a:t>  138 BPM</a:t>
+            </a:r>
           </a:p>
           <a:p>
             <a:pPr marL="36000" indent="-252000" algn="ctr">
@@ -10096,7 +10909,11 @@
               <a:buNone/>
             </a:pPr>
             <a:r>
-              <a:rPr lang="pt-BR" sz="7200" dirty="0"/>
+              <a:rPr lang="pt-BR" sz="7200" dirty="0">
+                <a:solidFill>
+                  <a:srgbClr val="FFFFFF"/>
+                </a:solidFill>
+              </a:rPr>
               <a:t>Nova Iorque </a:t>
             </a:r>
             <a:r>
@@ -10111,7 +10928,11 @@
               <a:rPr lang="pt-BR" sz="7200" dirty="0"/>
             </a:br>
             <a:r>
-              <a:rPr lang="pt-BR" sz="7200" dirty="0"/>
+              <a:rPr lang="pt-BR" sz="7200" dirty="0">
+                <a:solidFill>
+                  <a:srgbClr val="FFFFFF"/>
+                </a:solidFill>
+              </a:rPr>
               <a:t>Meu Ex Amor </a:t>
             </a:r>
             <a:r>
@@ -10126,7 +10947,11 @@
               <a:rPr lang="pt-BR" sz="7200" dirty="0"/>
             </a:br>
             <a:r>
-              <a:rPr lang="pt-BR" sz="7200" dirty="0"/>
+              <a:rPr lang="pt-BR" sz="7200" dirty="0">
+                <a:solidFill>
+                  <a:srgbClr val="FFFFFF"/>
+                </a:solidFill>
+              </a:rPr>
               <a:t>O Que Tiver Que Vir Virá </a:t>
             </a:r>
             <a:r>
@@ -10151,6 +10976,14 @@
 <file path=ppt/slides/slide33.xml><?xml version="1.0" encoding="utf-8"?>
 <p:sld xmlns:a="http://schemas.openxmlformats.org/drawingml/2006/main" xmlns:r="http://schemas.openxmlformats.org/officeDocument/2006/relationships" xmlns:p="http://schemas.openxmlformats.org/presentationml/2006/main">
   <p:cSld>
+    <p:bg>
+      <p:bgPr>
+        <a:solidFill>
+          <a:srgbClr val="000000"/>
+        </a:solidFill>
+        <a:effectLst/>
+      </p:bgPr>
+    </p:bg>
     <p:spTree>
       <p:nvGrpSpPr>
         <p:cNvPr id="1" name=""/>
@@ -10208,6 +11041,15 @@
               </a:rPr>
               <a:t>VS BLOCO 32</a:t>
             </a:r>
+            <a:r>
+              <a:rPr lang="pt-BR" sz="4800" baseline="41667" dirty="0">
+                <a:solidFill>
+                  <a:srgbClr val="FFFFFF"/>
+                </a:solidFill>
+                <a:cs typeface="Arial" panose="020B0604020202020204" pitchFamily="34" charset="0"/>
+              </a:rPr>
+              <a:t>  138 BPM</a:t>
+            </a:r>
           </a:p>
           <a:p>
             <a:pPr marL="36000" indent="-252000" algn="ctr">
@@ -10220,7 +11062,11 @@
               <a:buNone/>
             </a:pPr>
             <a:r>
-              <a:rPr lang="pt-BR" sz="7200" dirty="0"/>
+              <a:rPr lang="pt-BR" sz="7200" dirty="0">
+                <a:solidFill>
+                  <a:srgbClr val="FFFFFF"/>
+                </a:solidFill>
+              </a:rPr>
               <a:t>Ponto Chick </a:t>
             </a:r>
             <a:r>
@@ -10235,7 +11081,11 @@
               <a:rPr lang="pt-BR" sz="7200" dirty="0"/>
             </a:br>
             <a:r>
-              <a:rPr lang="pt-BR" sz="7200" dirty="0"/>
+              <a:rPr lang="pt-BR" sz="7200" dirty="0">
+                <a:solidFill>
+                  <a:srgbClr val="FFFFFF"/>
+                </a:solidFill>
+              </a:rPr>
               <a:t>Rancho Grande </a:t>
             </a:r>
             <a:r>
@@ -10250,7 +11100,11 @@
               <a:rPr lang="pt-BR" sz="7200" dirty="0"/>
             </a:br>
             <a:r>
-              <a:rPr lang="pt-BR" sz="7200" dirty="0"/>
+              <a:rPr lang="pt-BR" sz="7200" dirty="0">
+                <a:solidFill>
+                  <a:srgbClr val="FFFFFF"/>
+                </a:solidFill>
+              </a:rPr>
               <a:t>Feliz em Festa </a:t>
             </a:r>
             <a:r>
@@ -10275,6 +11129,14 @@
 <file path=ppt/slides/slide34.xml><?xml version="1.0" encoding="utf-8"?>
 <p:sld xmlns:a="http://schemas.openxmlformats.org/drawingml/2006/main" xmlns:r="http://schemas.openxmlformats.org/officeDocument/2006/relationships" xmlns:p="http://schemas.openxmlformats.org/presentationml/2006/main">
   <p:cSld>
+    <p:bg>
+      <p:bgPr>
+        <a:solidFill>
+          <a:srgbClr val="000000"/>
+        </a:solidFill>
+        <a:effectLst/>
+      </p:bgPr>
+    </p:bg>
     <p:spTree>
       <p:nvGrpSpPr>
         <p:cNvPr id="1" name=""/>
@@ -10332,6 +11194,15 @@
               </a:rPr>
               <a:t>VS BLOCO 33</a:t>
             </a:r>
+            <a:r>
+              <a:rPr lang="pt-BR" sz="4800" baseline="41667" dirty="0">
+                <a:solidFill>
+                  <a:srgbClr val="FFFFFF"/>
+                </a:solidFill>
+                <a:cs typeface="Arial" panose="020B0604020202020204" pitchFamily="34" charset="0"/>
+              </a:rPr>
+              <a:t>  142 BPM</a:t>
+            </a:r>
           </a:p>
           <a:p>
             <a:pPr marL="36000" indent="-252000" algn="ctr">
@@ -10344,7 +11215,11 @@
               <a:buNone/>
             </a:pPr>
             <a:r>
-              <a:rPr lang="pt-BR" sz="7200" dirty="0"/>
+              <a:rPr lang="pt-BR" sz="7200" dirty="0">
+                <a:solidFill>
+                  <a:srgbClr val="FFFFFF"/>
+                </a:solidFill>
+              </a:rPr>
               <a:t>A Festa É com Rota do Chopp </a:t>
             </a:r>
             <a:r>
@@ -10369,6 +11244,14 @@
 <file path=ppt/slides/slide35.xml><?xml version="1.0" encoding="utf-8"?>
 <p:sld xmlns:a="http://schemas.openxmlformats.org/drawingml/2006/main" xmlns:r="http://schemas.openxmlformats.org/officeDocument/2006/relationships" xmlns:p="http://schemas.openxmlformats.org/presentationml/2006/main">
   <p:cSld>
+    <p:bg>
+      <p:bgPr>
+        <a:solidFill>
+          <a:srgbClr val="000000"/>
+        </a:solidFill>
+        <a:effectLst/>
+      </p:bgPr>
+    </p:bg>
     <p:spTree>
       <p:nvGrpSpPr>
         <p:cNvPr id="1" name=""/>
@@ -10426,6 +11309,15 @@
               </a:rPr>
               <a:t>VS BLOCO 34</a:t>
             </a:r>
+            <a:r>
+              <a:rPr lang="pt-BR" sz="4800" baseline="41667" dirty="0">
+                <a:solidFill>
+                  <a:srgbClr val="FFFFFF"/>
+                </a:solidFill>
+                <a:cs typeface="Arial" panose="020B0604020202020204" pitchFamily="34" charset="0"/>
+              </a:rPr>
+              <a:t>  137 BPM</a:t>
+            </a:r>
           </a:p>
           <a:p>
             <a:pPr marL="36000" indent="-252000" algn="ctr">
@@ -10438,7 +11330,11 @@
               <a:buNone/>
             </a:pPr>
             <a:r>
-              <a:rPr lang="pt-BR" sz="7200" dirty="0"/>
+              <a:rPr lang="pt-BR" sz="7200" dirty="0">
+                <a:solidFill>
+                  <a:srgbClr val="FFFFFF"/>
+                </a:solidFill>
+              </a:rPr>
               <a:t>Maratá </a:t>
             </a:r>
             <a:r>
@@ -10453,7 +11349,11 @@
               <a:rPr lang="pt-BR" sz="7200" dirty="0"/>
             </a:br>
             <a:r>
-              <a:rPr lang="pt-BR" sz="7200" dirty="0"/>
+              <a:rPr lang="pt-BR" sz="7200" dirty="0">
+                <a:solidFill>
+                  <a:srgbClr val="FFFFFF"/>
+                </a:solidFill>
+              </a:rPr>
               <a:t>Levanta a Poeira </a:t>
             </a:r>
             <a:r>
@@ -10468,7 +11368,11 @@
               <a:rPr lang="pt-BR" sz="7200" dirty="0"/>
             </a:br>
             <a:r>
-              <a:rPr lang="pt-BR" sz="7200" dirty="0"/>
+              <a:rPr lang="pt-BR" sz="7200" dirty="0">
+                <a:solidFill>
+                  <a:srgbClr val="FFFFFF"/>
+                </a:solidFill>
+              </a:rPr>
               <a:t>Polka do Fritz </a:t>
             </a:r>
             <a:r>
@@ -10493,6 +11397,14 @@
 <file path=ppt/slides/slide36.xml><?xml version="1.0" encoding="utf-8"?>
 <p:sld xmlns:a="http://schemas.openxmlformats.org/drawingml/2006/main" xmlns:r="http://schemas.openxmlformats.org/officeDocument/2006/relationships" xmlns:p="http://schemas.openxmlformats.org/presentationml/2006/main">
   <p:cSld>
+    <p:bg>
+      <p:bgPr>
+        <a:solidFill>
+          <a:srgbClr val="000000"/>
+        </a:solidFill>
+        <a:effectLst/>
+      </p:bgPr>
+    </p:bg>
     <p:spTree>
       <p:nvGrpSpPr>
         <p:cNvPr id="1" name=""/>
@@ -10550,6 +11462,15 @@
               </a:rPr>
               <a:t>VS BLOCO 35</a:t>
             </a:r>
+            <a:r>
+              <a:rPr lang="pt-BR" sz="4800" baseline="41667" dirty="0">
+                <a:solidFill>
+                  <a:srgbClr val="FFFFFF"/>
+                </a:solidFill>
+                <a:cs typeface="Arial" panose="020B0604020202020204" pitchFamily="34" charset="0"/>
+              </a:rPr>
+              <a:t>  176-190 BPM</a:t>
+            </a:r>
           </a:p>
           <a:p>
             <a:pPr marL="36000" indent="-252000" algn="ctr">
@@ -10562,7 +11483,11 @@
               <a:buNone/>
             </a:pPr>
             <a:r>
-              <a:rPr lang="pt-BR" sz="7200" dirty="0"/>
+              <a:rPr lang="pt-BR" sz="7200" dirty="0">
+                <a:solidFill>
+                  <a:srgbClr val="FFFFFF"/>
+                </a:solidFill>
+              </a:rPr>
               <a:t>Na Hora de Amar </a:t>
             </a:r>
             <a:r>
@@ -10577,7 +11502,11 @@
               <a:rPr lang="pt-BR" sz="7200" dirty="0"/>
             </a:br>
             <a:r>
-              <a:rPr lang="pt-BR" sz="7200" dirty="0"/>
+              <a:rPr lang="pt-BR" sz="7200" dirty="0">
+                <a:solidFill>
+                  <a:srgbClr val="FFFFFF"/>
+                </a:solidFill>
+              </a:rPr>
               <a:t>Página de Amigos </a:t>
             </a:r>
             <a:r>
@@ -10592,7 +11521,11 @@
               <a:rPr lang="pt-BR" sz="7200" dirty="0"/>
             </a:br>
             <a:r>
-              <a:rPr lang="pt-BR" sz="7200" dirty="0"/>
+              <a:rPr lang="pt-BR" sz="7200" dirty="0">
+                <a:solidFill>
+                  <a:srgbClr val="FFFFFF"/>
+                </a:solidFill>
+              </a:rPr>
               <a:t>Dormi na Praça </a:t>
             </a:r>
             <a:r>
@@ -10607,7 +11540,11 @@
               <a:rPr lang="pt-BR" sz="7200" dirty="0"/>
             </a:br>
             <a:r>
-              <a:rPr lang="pt-BR" sz="7200" dirty="0"/>
+              <a:rPr lang="pt-BR" sz="7200" dirty="0">
+                <a:solidFill>
+                  <a:srgbClr val="FFFFFF"/>
+                </a:solidFill>
+              </a:rPr>
               <a:t>Temporal de Amor </a:t>
             </a:r>
             <a:r>
@@ -10622,8 +11559,127 @@
               <a:rPr lang="pt-BR" sz="7200" dirty="0"/>
             </a:br>
             <a:r>
-              <a:rPr lang="pt-BR" sz="7200" dirty="0"/>
+              <a:rPr lang="pt-BR" sz="7200" dirty="0">
+                <a:solidFill>
+                  <a:srgbClr val="FFFFFF"/>
+                </a:solidFill>
+              </a:rPr>
               <a:t>Evidências </a:t>
+            </a:r>
+            <a:r>
+              <a:rPr lang="pt-BR" sz="7200" dirty="0">
+                <a:solidFill>
+                  <a:srgbClr val="FF0000"/>
+                </a:solidFill>
+              </a:rPr>
+              <a:t>??</a:t>
+            </a:r>
+          </a:p>
+        </p:txBody>
+      </p:sp>
+    </p:spTree>
+  </p:cSld>
+  <p:clrMapOvr>
+    <a:masterClrMapping/>
+  </p:clrMapOvr>
+</p:sld>
+</file>
+
+<file path=ppt/slides/slide37.xml><?xml version="1.0" encoding="utf-8"?>
+<p:sld xmlns:a="http://schemas.openxmlformats.org/drawingml/2006/main" xmlns:r="http://schemas.openxmlformats.org/officeDocument/2006/relationships" xmlns:p="http://schemas.openxmlformats.org/presentationml/2006/main">
+  <p:cSld>
+    <p:bg>
+      <p:bgPr>
+        <a:solidFill>
+          <a:srgbClr val="000000"/>
+        </a:solidFill>
+        <a:effectLst/>
+      </p:bgPr>
+    </p:bg>
+    <p:spTree>
+      <p:nvGrpSpPr>
+        <p:cNvPr id="1" name=""/>
+        <p:cNvGrpSpPr/>
+        <p:nvPr/>
+      </p:nvGrpSpPr>
+      <p:grpSpPr>
+        <a:xfrm>
+          <a:off x="0" y="0"/>
+          <a:ext cx="0" cy="0"/>
+          <a:chOff x="0" y="0"/>
+          <a:chExt cx="0" cy="0"/>
+        </a:xfrm>
+      </p:grpSpPr>
+      <p:sp>
+        <p:nvSpPr>
+          <p:cNvPr id="3" name="Espaço Reservado para Conteúdo 2">
+            <a:extLst>
+              <a:ext uri="{FF2B5EF4-FFF2-40B4-BE49-F238E27FC236}">
+                <a16:creationId xmlns:a16="http://schemas.microsoft.com/office/drawing/2014/main" id="{7C70BAA2-54A1-BAA9-5EF9-9F93F22AE700}"/>
+              </a:ext>
+            </a:extLst>
+          </p:cNvPr>
+          <p:cNvSpPr>
+            <a:spLocks noGrp="1"/>
+          </p:cNvSpPr>
+          <p:nvPr>
+            <p:ph idx="1"/>
+          </p:nvPr>
+        </p:nvSpPr>
+        <p:spPr>
+          <a:xfrm>
+            <a:off x="10509" y="-3937"/>
+            <a:ext cx="12181491" cy="6861937"/>
+          </a:xfrm>
+        </p:spPr>
+        <p:txBody>
+          <a:bodyPr>
+            <a:noAutofit/>
+          </a:bodyPr>
+          <a:lstStyle/>
+          <a:p>
+            <a:pPr algn="ctr">
+              <a:lnSpc>
+                <a:spcPct val="100000"/>
+              </a:lnSpc>
+              <a:buNone/>
+            </a:pPr>
+            <a:r>
+              <a:rPr lang="en-US" sz="8800" dirty="0">
+                <a:solidFill>
+                  <a:srgbClr val="FF0000"/>
+                </a:solidFill>
+                <a:cs typeface="Arial" panose="020B0604020202020204" pitchFamily="34" charset="0"/>
+              </a:rPr>
+              <a:t>VS BLOCO 36</a:t>
+            </a:r>
+            <a:r>
+              <a:rPr lang="pt-BR" sz="4800" baseline="41667" dirty="0">
+                <a:solidFill>
+                  <a:srgbClr val="FFFFFF"/>
+                </a:solidFill>
+                <a:cs typeface="Arial" panose="020B0604020202020204" pitchFamily="34" charset="0"/>
+              </a:rPr>
+              <a:t>  135 BPM</a:t>
+            </a:r>
+          </a:p>
+          <a:p>
+            <a:pPr marL="36000" indent="-252000" algn="ctr">
+              <a:lnSpc>
+                <a:spcPct val="100000"/>
+              </a:lnSpc>
+              <a:spcBef>
+                <a:spcPts val="0"/>
+              </a:spcBef>
+              <a:buNone/>
+            </a:pPr>
+            <a:r>
+              <a:rPr lang="pt-BR" sz="7200" dirty="0">
+                <a:solidFill>
+                  <a:srgbClr val="FFFFFF"/>
+                </a:solidFill>
+              </a:rPr>
+              <a:t>Futurista </a:t>
             </a:r>
             <a:r>
               <a:rPr lang="pt-BR" sz="7200" dirty="0">
@@ -10647,6 +11703,14 @@
 <file path=ppt/slides/slide4.xml><?xml version="1.0" encoding="utf-8"?>
 <p:sld xmlns:a="http://schemas.openxmlformats.org/drawingml/2006/main" xmlns:r="http://schemas.openxmlformats.org/officeDocument/2006/relationships" xmlns:p="http://schemas.openxmlformats.org/presentationml/2006/main">
   <p:cSld>
+    <p:bg>
+      <p:bgPr>
+        <a:solidFill>
+          <a:srgbClr val="000000"/>
+        </a:solidFill>
+        <a:effectLst/>
+      </p:bgPr>
+    </p:bg>
     <p:spTree>
       <p:nvGrpSpPr>
         <p:cNvPr id="1" name="">
@@ -10710,6 +11774,15 @@
               </a:rPr>
               <a:t>VS BLOCO 3</a:t>
             </a:r>
+            <a:r>
+              <a:rPr lang="pt-BR" sz="4800" baseline="41667" dirty="0">
+                <a:solidFill>
+                  <a:srgbClr val="FFFFFF"/>
+                </a:solidFill>
+                <a:cs typeface="Arial" panose="020B0604020202020204" pitchFamily="34" charset="0"/>
+              </a:rPr>
+              <a:t>  130 BPM</a:t>
+            </a:r>
           </a:p>
           <a:p>
             <a:pPr marL="36000" indent="-252000" algn="ctr">
@@ -10723,6 +11796,9 @@
             </a:pPr>
             <a:r>
               <a:rPr lang="en-US" sz="7200" dirty="0">
+                <a:solidFill>
+                  <a:srgbClr val="FFFFFF"/>
+                </a:solidFill>
                 <a:cs typeface="Arial" panose="020B0604020202020204" pitchFamily="34" charset="0"/>
               </a:rPr>
               <a:t>Barco do Amor </a:t>
@@ -10749,30 +11825,45 @@
             </a:pPr>
             <a:r>
               <a:rPr lang="en-US" sz="7200" dirty="0">
+                <a:solidFill>
+                  <a:srgbClr val="FFFFFF"/>
+                </a:solidFill>
                 <a:cs typeface="Arial" panose="020B0604020202020204" pitchFamily="34" charset="0"/>
               </a:rPr>
               <a:t>Sem Amor </a:t>
             </a:r>
             <a:r>
               <a:rPr lang="en-US" sz="7200" dirty="0" err="1">
+                <a:solidFill>
+                  <a:srgbClr val="FFFFFF"/>
+                </a:solidFill>
                 <a:cs typeface="Arial" panose="020B0604020202020204" pitchFamily="34" charset="0"/>
               </a:rPr>
               <a:t>Ningém</a:t>
             </a:r>
             <a:r>
               <a:rPr lang="en-US" sz="7200" dirty="0">
+                <a:solidFill>
+                  <a:srgbClr val="FFFFFF"/>
+                </a:solidFill>
                 <a:cs typeface="Arial" panose="020B0604020202020204" pitchFamily="34" charset="0"/>
               </a:rPr>
               <a:t> </a:t>
             </a:r>
             <a:r>
               <a:rPr lang="en-US" sz="7200" dirty="0" err="1">
+                <a:solidFill>
+                  <a:srgbClr val="FFFFFF"/>
+                </a:solidFill>
                 <a:cs typeface="Arial" panose="020B0604020202020204" pitchFamily="34" charset="0"/>
               </a:rPr>
               <a:t>Vive</a:t>
             </a:r>
             <a:r>
               <a:rPr lang="en-US" sz="7200" dirty="0">
+                <a:solidFill>
+                  <a:srgbClr val="FFFFFF"/>
+                </a:solidFill>
                 <a:cs typeface="Arial" panose="020B0604020202020204" pitchFamily="34" charset="0"/>
               </a:rPr>
               <a:t> </a:t>
@@ -10805,12 +11896,18 @@
             </a:pPr>
             <a:r>
               <a:rPr lang="en-US" sz="7200" dirty="0" err="1">
+                <a:solidFill>
+                  <a:srgbClr val="FFFFFF"/>
+                </a:solidFill>
                 <a:cs typeface="Arial" panose="020B0604020202020204" pitchFamily="34" charset="0"/>
               </a:rPr>
               <a:t>Rosto</a:t>
             </a:r>
             <a:r>
               <a:rPr lang="en-US" sz="7200" dirty="0">
+                <a:solidFill>
+                  <a:srgbClr val="FFFFFF"/>
+                </a:solidFill>
                 <a:cs typeface="Arial" panose="020B0604020202020204" pitchFamily="34" charset="0"/>
               </a:rPr>
               <a:t> Desmaquiado </a:t>
@@ -10837,6 +11934,9 @@
             </a:pPr>
             <a:r>
               <a:rPr lang="en-US" sz="7200" dirty="0">
+                <a:solidFill>
+                  <a:srgbClr val="FFFFFF"/>
+                </a:solidFill>
                 <a:cs typeface="Arial" panose="020B0604020202020204" pitchFamily="34" charset="0"/>
               </a:rPr>
               <a:t>Vida Cor de Rosa </a:t>
@@ -10889,6 +11989,14 @@
 <file path=ppt/slides/slide5.xml><?xml version="1.0" encoding="utf-8"?>
 <p:sld xmlns:a="http://schemas.openxmlformats.org/drawingml/2006/main" xmlns:r="http://schemas.openxmlformats.org/officeDocument/2006/relationships" xmlns:p="http://schemas.openxmlformats.org/presentationml/2006/main">
   <p:cSld>
+    <p:bg>
+      <p:bgPr>
+        <a:solidFill>
+          <a:srgbClr val="000000"/>
+        </a:solidFill>
+        <a:effectLst/>
+      </p:bgPr>
+    </p:bg>
     <p:spTree>
       <p:nvGrpSpPr>
         <p:cNvPr id="1" name="">
@@ -10952,6 +12060,15 @@
               </a:rPr>
               <a:t>VS BLOCO 4</a:t>
             </a:r>
+            <a:r>
+              <a:rPr lang="pt-BR" sz="4800" baseline="41667" dirty="0">
+                <a:solidFill>
+                  <a:srgbClr val="FFFFFF"/>
+                </a:solidFill>
+                <a:cs typeface="Arial" panose="020B0604020202020204" pitchFamily="34" charset="0"/>
+              </a:rPr>
+              <a:t>  188 BPM</a:t>
+            </a:r>
           </a:p>
           <a:p>
             <a:pPr marL="36000" indent="-252000" algn="ctr">
@@ -10964,12 +12081,20 @@
               <a:buNone/>
             </a:pPr>
             <a:r>
-              <a:rPr lang="pt-BR" sz="7200" dirty="0" err="1"/>
-              <a:t>Barquinnha</a:t>
-            </a:r>
-            <a:r>
-              <a:rPr lang="pt-BR" sz="7200" dirty="0"/>
-              <a:t> De Ouro </a:t>
+              <a:rPr lang="pt-BR" sz="7200" dirty="0" err="1">
+                <a:solidFill>
+                  <a:srgbClr val="FFFFFF"/>
+                </a:solidFill>
+              </a:rPr>
+              <a:t>Barquinha De Ouro </a:t>
+            </a:r>
+            <a:r>
+              <a:rPr lang="pt-BR" sz="7200" dirty="0">
+                <a:solidFill>
+                  <a:srgbClr val="FFFFFF"/>
+                </a:solidFill>
+              </a:rPr>
+              <a:t/>
             </a:r>
             <a:r>
               <a:rPr lang="pt-BR" sz="7200" dirty="0" err="1">
@@ -10991,19 +12116,35 @@
               <a:rPr lang="pt-BR" sz="7200" dirty="0"/>
             </a:br>
             <a:r>
-              <a:rPr lang="pt-BR" sz="7200" dirty="0" err="1"/>
+              <a:rPr lang="pt-BR" sz="7200" dirty="0" err="1">
+                <a:solidFill>
+                  <a:srgbClr val="FFFFFF"/>
+                </a:solidFill>
+              </a:rPr>
               <a:t>Voce</a:t>
             </a:r>
             <a:r>
-              <a:rPr lang="pt-BR" sz="7200" dirty="0"/>
+              <a:rPr lang="pt-BR" sz="7200" dirty="0">
+                <a:solidFill>
+                  <a:srgbClr val="FFFFFF"/>
+                </a:solidFill>
+              </a:rPr>
               <a:t> </a:t>
             </a:r>
             <a:r>
-              <a:rPr lang="pt-BR" sz="7200" dirty="0" err="1"/>
+              <a:rPr lang="pt-BR" sz="7200" dirty="0" err="1">
+                <a:solidFill>
+                  <a:srgbClr val="FFFFFF"/>
+                </a:solidFill>
+              </a:rPr>
               <a:t>Nao</a:t>
             </a:r>
             <a:r>
-              <a:rPr lang="pt-BR" sz="7200" dirty="0"/>
+              <a:rPr lang="pt-BR" sz="7200" dirty="0">
+                <a:solidFill>
+                  <a:srgbClr val="FFFFFF"/>
+                </a:solidFill>
+              </a:rPr>
               <a:t> Vale Nada </a:t>
             </a:r>
             <a:r>
@@ -11018,7 +12159,11 @@
               <a:rPr lang="pt-BR" sz="7200" dirty="0"/>
             </a:br>
             <a:r>
-              <a:rPr lang="pt-BR" sz="7200" dirty="0"/>
+              <a:rPr lang="pt-BR" sz="7200" dirty="0">
+                <a:solidFill>
+                  <a:srgbClr val="FFFFFF"/>
+                </a:solidFill>
+              </a:rPr>
               <a:t>Morango Do Nordeste </a:t>
             </a:r>
             <a:r>
@@ -11054,6 +12199,14 @@
 <file path=ppt/slides/slide6.xml><?xml version="1.0" encoding="utf-8"?>
 <p:sld xmlns:a="http://schemas.openxmlformats.org/drawingml/2006/main" xmlns:r="http://schemas.openxmlformats.org/officeDocument/2006/relationships" xmlns:p="http://schemas.openxmlformats.org/presentationml/2006/main">
   <p:cSld>
+    <p:bg>
+      <p:bgPr>
+        <a:solidFill>
+          <a:srgbClr val="000000"/>
+        </a:solidFill>
+        <a:effectLst/>
+      </p:bgPr>
+    </p:bg>
     <p:spTree>
       <p:nvGrpSpPr>
         <p:cNvPr id="1" name="">
@@ -11117,6 +12270,15 @@
               </a:rPr>
               <a:t>VS BLOCO 5</a:t>
             </a:r>
+            <a:r>
+              <a:rPr lang="pt-BR" sz="4800" baseline="41667" dirty="0">
+                <a:solidFill>
+                  <a:srgbClr val="FFFFFF"/>
+                </a:solidFill>
+                <a:cs typeface="Arial" panose="020B0604020202020204" pitchFamily="34" charset="0"/>
+              </a:rPr>
+              <a:t>  168 BPM</a:t>
+            </a:r>
           </a:p>
           <a:p>
             <a:pPr marL="36000" indent="-252000" algn="ctr">
@@ -11130,18 +12292,27 @@
             </a:pPr>
             <a:r>
               <a:rPr lang="en-US" sz="6000" dirty="0">
+                <a:solidFill>
+                  <a:srgbClr val="FFFFFF"/>
+                </a:solidFill>
                 <a:cs typeface="Arial" panose="020B0604020202020204" pitchFamily="34" charset="0"/>
               </a:rPr>
               <a:t>Camisa </a:t>
             </a:r>
             <a:r>
               <a:rPr lang="en-US" sz="6000" dirty="0" err="1">
+                <a:solidFill>
+                  <a:srgbClr val="FFFFFF"/>
+                </a:solidFill>
                 <a:cs typeface="Arial" panose="020B0604020202020204" pitchFamily="34" charset="0"/>
               </a:rPr>
               <a:t>Manchada</a:t>
             </a:r>
             <a:r>
               <a:rPr lang="en-US" sz="6000" dirty="0">
+                <a:solidFill>
+                  <a:srgbClr val="FFFFFF"/>
+                </a:solidFill>
                 <a:cs typeface="Arial" panose="020B0604020202020204" pitchFamily="34" charset="0"/>
               </a:rPr>
               <a:t> </a:t>
@@ -11168,18 +12339,27 @@
             </a:pPr>
             <a:r>
               <a:rPr lang="en-US" sz="6000" dirty="0">
+                <a:solidFill>
+                  <a:srgbClr val="FFFFFF"/>
+                </a:solidFill>
                 <a:cs typeface="Arial" panose="020B0604020202020204" pitchFamily="34" charset="0"/>
               </a:rPr>
               <a:t>Esta Noite Como </a:t>
             </a:r>
             <a:r>
               <a:rPr lang="en-US" sz="6000" dirty="0" err="1">
+                <a:solidFill>
+                  <a:srgbClr val="FFFFFF"/>
+                </a:solidFill>
                 <a:cs typeface="Arial" panose="020B0604020202020204" pitchFamily="34" charset="0"/>
               </a:rPr>
               <a:t>Lembrança</a:t>
             </a:r>
             <a:r>
               <a:rPr lang="en-US" sz="6000" dirty="0">
+                <a:solidFill>
+                  <a:srgbClr val="FFFFFF"/>
+                </a:solidFill>
                 <a:cs typeface="Arial" panose="020B0604020202020204" pitchFamily="34" charset="0"/>
               </a:rPr>
               <a:t> </a:t>
@@ -11232,6 +12412,14 @@
 <file path=ppt/slides/slide7.xml><?xml version="1.0" encoding="utf-8"?>
 <p:sld xmlns:a="http://schemas.openxmlformats.org/drawingml/2006/main" xmlns:r="http://schemas.openxmlformats.org/officeDocument/2006/relationships" xmlns:p="http://schemas.openxmlformats.org/presentationml/2006/main">
   <p:cSld>
+    <p:bg>
+      <p:bgPr>
+        <a:solidFill>
+          <a:srgbClr val="000000"/>
+        </a:solidFill>
+        <a:effectLst/>
+      </p:bgPr>
+    </p:bg>
     <p:spTree>
       <p:nvGrpSpPr>
         <p:cNvPr id="1" name="">
@@ -11295,6 +12483,15 @@
               </a:rPr>
               <a:t>VS BLOCO 6</a:t>
             </a:r>
+            <a:r>
+              <a:rPr lang="pt-BR" sz="4800" baseline="41667" dirty="0">
+                <a:solidFill>
+                  <a:srgbClr val="FFFFFF"/>
+                </a:solidFill>
+                <a:cs typeface="Arial" panose="020B0604020202020204" pitchFamily="34" charset="0"/>
+              </a:rPr>
+              <a:t>  180 / 200 BPM</a:t>
+            </a:r>
           </a:p>
           <a:p>
             <a:pPr marL="36000" indent="-252000" algn="ctr">
@@ -11307,7 +12504,11 @@
               <a:buNone/>
             </a:pPr>
             <a:r>
-              <a:rPr lang="pt-BR" sz="7200" dirty="0"/>
+              <a:rPr lang="pt-BR" sz="7200" dirty="0">
+                <a:solidFill>
+                  <a:srgbClr val="FFFFFF"/>
+                </a:solidFill>
+              </a:rPr>
               <a:t>Catchaqueira </a:t>
             </a:r>
             <a:r>
@@ -11322,7 +12523,11 @@
               <a:rPr lang="pt-BR" sz="7200" dirty="0"/>
             </a:br>
             <a:r>
-              <a:rPr lang="pt-BR" sz="7200" dirty="0"/>
+              <a:rPr lang="pt-BR" sz="7200" dirty="0">
+                <a:solidFill>
+                  <a:srgbClr val="FFFFFF"/>
+                </a:solidFill>
+              </a:rPr>
               <a:t>Luz Da Minha Vida </a:t>
             </a:r>
             <a:r>
@@ -11358,6 +12563,14 @@
 <file path=ppt/slides/slide8.xml><?xml version="1.0" encoding="utf-8"?>
 <p:sld xmlns:a="http://schemas.openxmlformats.org/drawingml/2006/main" xmlns:r="http://schemas.openxmlformats.org/officeDocument/2006/relationships" xmlns:p="http://schemas.openxmlformats.org/presentationml/2006/main">
   <p:cSld>
+    <p:bg>
+      <p:bgPr>
+        <a:solidFill>
+          <a:srgbClr val="000000"/>
+        </a:solidFill>
+        <a:effectLst/>
+      </p:bgPr>
+    </p:bg>
     <p:spTree>
       <p:nvGrpSpPr>
         <p:cNvPr id="1" name="">
@@ -11421,6 +12634,15 @@
               </a:rPr>
               <a:t>VS BLOCO 7</a:t>
             </a:r>
+            <a:r>
+              <a:rPr lang="pt-BR" sz="4800" baseline="41667" dirty="0">
+                <a:solidFill>
+                  <a:srgbClr val="FFFFFF"/>
+                </a:solidFill>
+                <a:cs typeface="Arial" panose="020B0604020202020204" pitchFamily="34" charset="0"/>
+              </a:rPr>
+              <a:t>  142 BPM</a:t>
+            </a:r>
           </a:p>
           <a:p>
             <a:pPr marL="36000" indent="-252000" algn="ctr">
@@ -11433,7 +12655,11 @@
               <a:buNone/>
             </a:pPr>
             <a:r>
-              <a:rPr lang="pt-BR" sz="7200" dirty="0"/>
+              <a:rPr lang="pt-BR" sz="7200" dirty="0">
+                <a:solidFill>
+                  <a:srgbClr val="FFFFFF"/>
+                </a:solidFill>
+              </a:rPr>
               <a:t>Culpa é Sua </a:t>
             </a:r>
             <a:r>
@@ -11448,7 +12674,11 @@
               <a:rPr lang="pt-BR" sz="7200" dirty="0"/>
             </a:br>
             <a:r>
-              <a:rPr lang="pt-BR" sz="7200" dirty="0"/>
+              <a:rPr lang="pt-BR" sz="7200" dirty="0">
+                <a:solidFill>
+                  <a:srgbClr val="FFFFFF"/>
+                </a:solidFill>
+              </a:rPr>
               <a:t>Risca Faca </a:t>
             </a:r>
             <a:r>
@@ -11463,7 +12693,11 @@
               <a:rPr lang="pt-BR" sz="7200" dirty="0"/>
             </a:br>
             <a:r>
-              <a:rPr lang="pt-BR" sz="7200" dirty="0"/>
+              <a:rPr lang="pt-BR" sz="7200" dirty="0">
+                <a:solidFill>
+                  <a:srgbClr val="FFFFFF"/>
+                </a:solidFill>
+              </a:rPr>
               <a:t>Lua e a Noite </a:t>
             </a:r>
             <a:r>
@@ -11499,6 +12733,14 @@
 <file path=ppt/slides/slide9.xml><?xml version="1.0" encoding="utf-8"?>
 <p:sld xmlns:a="http://schemas.openxmlformats.org/drawingml/2006/main" xmlns:r="http://schemas.openxmlformats.org/officeDocument/2006/relationships" xmlns:p="http://schemas.openxmlformats.org/presentationml/2006/main">
   <p:cSld>
+    <p:bg>
+      <p:bgPr>
+        <a:solidFill>
+          <a:srgbClr val="000000"/>
+        </a:solidFill>
+        <a:effectLst/>
+      </p:bgPr>
+    </p:bg>
     <p:spTree>
       <p:nvGrpSpPr>
         <p:cNvPr id="1" name="">
@@ -11562,6 +12804,15 @@
               </a:rPr>
               <a:t>VS BLOCO 8</a:t>
             </a:r>
+            <a:r>
+              <a:rPr lang="pt-BR" sz="4800" baseline="41667" dirty="0">
+                <a:solidFill>
+                  <a:srgbClr val="FFFFFF"/>
+                </a:solidFill>
+                <a:cs typeface="Arial" panose="020B0604020202020204" pitchFamily="34" charset="0"/>
+              </a:rPr>
+              <a:t>  175 BPM</a:t>
+            </a:r>
           </a:p>
           <a:p>
             <a:pPr marL="36000" indent="-252000" algn="ctr">
@@ -11574,7 +12825,11 @@
               <a:buNone/>
             </a:pPr>
             <a:r>
-              <a:rPr lang="pt-BR" sz="6600" dirty="0"/>
+              <a:rPr lang="pt-BR" sz="6600" dirty="0">
+                <a:solidFill>
+                  <a:srgbClr val="FFFFFF"/>
+                </a:solidFill>
+              </a:rPr>
               <a:t>Do Outro Lado Da Cidade </a:t>
             </a:r>
             <a:r>
@@ -11589,7 +12844,11 @@
               <a:rPr lang="pt-BR" sz="6600" dirty="0"/>
             </a:br>
             <a:r>
-              <a:rPr lang="pt-BR" sz="6600" dirty="0"/>
+              <a:rPr lang="pt-BR" sz="6600" dirty="0">
+                <a:solidFill>
+                  <a:srgbClr val="FFFFFF"/>
+                </a:solidFill>
+              </a:rPr>
               <a:t>Estrada Da Vida </a:t>
             </a:r>
             <a:r>
